--- a/ゲーム制作企画書.pptx
+++ b/ゲーム制作企画書.pptx
@@ -9,6 +9,7 @@
     <p:sldId id="257" r:id="rId3"/>
     <p:sldId id="258" r:id="rId4"/>
     <p:sldId id="259" r:id="rId5"/>
+    <p:sldId id="260" r:id="rId6"/>
   </p:sldIdLst>
   <p:sldSz cx="12192000" cy="6858000"/>
   <p:notesSz cx="6858000" cy="9144000"/>
@@ -301,7 +302,7 @@
           <a:p>
             <a:fld id="{021EE310-EC55-4FE5-9459-5D3CEDE369C6}" type="datetimeFigureOut">
               <a:rPr kumimoji="1" lang="ja-JP" altLang="en-US" smtClean="0"/>
-              <a:t>2025/10/9</a:t>
+              <a:t>2025/12/10</a:t>
             </a:fld>
             <a:endParaRPr kumimoji="1" lang="ja-JP" altLang="en-US"/>
           </a:p>
@@ -576,7 +577,7 @@
           <a:p>
             <a:fld id="{021EE310-EC55-4FE5-9459-5D3CEDE369C6}" type="datetimeFigureOut">
               <a:rPr kumimoji="1" lang="ja-JP" altLang="en-US" smtClean="0"/>
-              <a:t>2025/10/9</a:t>
+              <a:t>2025/12/10</a:t>
             </a:fld>
             <a:endParaRPr kumimoji="1" lang="ja-JP" altLang="en-US"/>
           </a:p>
@@ -770,7 +771,7 @@
           <a:p>
             <a:fld id="{021EE310-EC55-4FE5-9459-5D3CEDE369C6}" type="datetimeFigureOut">
               <a:rPr kumimoji="1" lang="ja-JP" altLang="en-US" smtClean="0"/>
-              <a:t>2025/10/9</a:t>
+              <a:t>2025/12/10</a:t>
             </a:fld>
             <a:endParaRPr kumimoji="1" lang="ja-JP" altLang="en-US"/>
           </a:p>
@@ -1043,7 +1044,7 @@
           <a:p>
             <a:fld id="{021EE310-EC55-4FE5-9459-5D3CEDE369C6}" type="datetimeFigureOut">
               <a:rPr kumimoji="1" lang="ja-JP" altLang="en-US" smtClean="0"/>
-              <a:t>2025/10/9</a:t>
+              <a:t>2025/12/10</a:t>
             </a:fld>
             <a:endParaRPr kumimoji="1" lang="ja-JP" altLang="en-US"/>
           </a:p>
@@ -1384,7 +1385,7 @@
           <a:p>
             <a:fld id="{021EE310-EC55-4FE5-9459-5D3CEDE369C6}" type="datetimeFigureOut">
               <a:rPr kumimoji="1" lang="ja-JP" altLang="en-US" smtClean="0"/>
-              <a:t>2025/10/9</a:t>
+              <a:t>2025/12/10</a:t>
             </a:fld>
             <a:endParaRPr kumimoji="1" lang="ja-JP" altLang="en-US"/>
           </a:p>
@@ -2007,7 +2008,7 @@
           <a:p>
             <a:fld id="{021EE310-EC55-4FE5-9459-5D3CEDE369C6}" type="datetimeFigureOut">
               <a:rPr kumimoji="1" lang="ja-JP" altLang="en-US" smtClean="0"/>
-              <a:t>2025/10/9</a:t>
+              <a:t>2025/12/10</a:t>
             </a:fld>
             <a:endParaRPr kumimoji="1" lang="ja-JP" altLang="en-US"/>
           </a:p>
@@ -2867,7 +2868,7 @@
           <a:p>
             <a:fld id="{021EE310-EC55-4FE5-9459-5D3CEDE369C6}" type="datetimeFigureOut">
               <a:rPr kumimoji="1" lang="ja-JP" altLang="en-US" smtClean="0"/>
-              <a:t>2025/10/9</a:t>
+              <a:t>2025/12/10</a:t>
             </a:fld>
             <a:endParaRPr kumimoji="1" lang="ja-JP" altLang="en-US"/>
           </a:p>
@@ -3069,7 +3070,7 @@
           <a:p>
             <a:fld id="{021EE310-EC55-4FE5-9459-5D3CEDE369C6}" type="datetimeFigureOut">
               <a:rPr kumimoji="1" lang="ja-JP" altLang="en-US" smtClean="0"/>
-              <a:t>2025/10/9</a:t>
+              <a:t>2025/12/10</a:t>
             </a:fld>
             <a:endParaRPr kumimoji="1" lang="ja-JP" altLang="en-US"/>
           </a:p>
@@ -3281,7 +3282,7 @@
           <a:p>
             <a:fld id="{021EE310-EC55-4FE5-9459-5D3CEDE369C6}" type="datetimeFigureOut">
               <a:rPr kumimoji="1" lang="ja-JP" altLang="en-US" smtClean="0"/>
-              <a:t>2025/10/9</a:t>
+              <a:t>2025/12/10</a:t>
             </a:fld>
             <a:endParaRPr kumimoji="1" lang="ja-JP" altLang="en-US"/>
           </a:p>
@@ -3483,7 +3484,7 @@
           <a:p>
             <a:fld id="{021EE310-EC55-4FE5-9459-5D3CEDE369C6}" type="datetimeFigureOut">
               <a:rPr kumimoji="1" lang="ja-JP" altLang="en-US" smtClean="0"/>
-              <a:t>2025/10/9</a:t>
+              <a:t>2025/12/10</a:t>
             </a:fld>
             <a:endParaRPr kumimoji="1" lang="ja-JP" altLang="en-US"/>
           </a:p>
@@ -3730,7 +3731,7 @@
           <a:p>
             <a:fld id="{021EE310-EC55-4FE5-9459-5D3CEDE369C6}" type="datetimeFigureOut">
               <a:rPr kumimoji="1" lang="ja-JP" altLang="en-US" smtClean="0"/>
-              <a:t>2025/10/9</a:t>
+              <a:t>2025/12/10</a:t>
             </a:fld>
             <a:endParaRPr kumimoji="1" lang="ja-JP" altLang="en-US"/>
           </a:p>
@@ -4086,7 +4087,7 @@
           <a:p>
             <a:fld id="{021EE310-EC55-4FE5-9459-5D3CEDE369C6}" type="datetimeFigureOut">
               <a:rPr kumimoji="1" lang="ja-JP" altLang="en-US" smtClean="0"/>
-              <a:t>2025/10/9</a:t>
+              <a:t>2025/12/10</a:t>
             </a:fld>
             <a:endParaRPr kumimoji="1" lang="ja-JP" altLang="en-US"/>
           </a:p>
@@ -4594,7 +4595,7 @@
           <a:p>
             <a:fld id="{021EE310-EC55-4FE5-9459-5D3CEDE369C6}" type="datetimeFigureOut">
               <a:rPr kumimoji="1" lang="ja-JP" altLang="en-US" smtClean="0"/>
-              <a:t>2025/10/9</a:t>
+              <a:t>2025/12/10</a:t>
             </a:fld>
             <a:endParaRPr kumimoji="1" lang="ja-JP" altLang="en-US"/>
           </a:p>
@@ -4712,7 +4713,7 @@
           <a:p>
             <a:fld id="{021EE310-EC55-4FE5-9459-5D3CEDE369C6}" type="datetimeFigureOut">
               <a:rPr kumimoji="1" lang="ja-JP" altLang="en-US" smtClean="0"/>
-              <a:t>2025/10/9</a:t>
+              <a:t>2025/12/10</a:t>
             </a:fld>
             <a:endParaRPr kumimoji="1" lang="ja-JP" altLang="en-US"/>
           </a:p>
@@ -4807,7 +4808,7 @@
           <a:p>
             <a:fld id="{021EE310-EC55-4FE5-9459-5D3CEDE369C6}" type="datetimeFigureOut">
               <a:rPr kumimoji="1" lang="ja-JP" altLang="en-US" smtClean="0"/>
-              <a:t>2025/10/9</a:t>
+              <a:t>2025/12/10</a:t>
             </a:fld>
             <a:endParaRPr kumimoji="1" lang="ja-JP" altLang="en-US"/>
           </a:p>
@@ -5118,7 +5119,7 @@
           <a:p>
             <a:fld id="{021EE310-EC55-4FE5-9459-5D3CEDE369C6}" type="datetimeFigureOut">
               <a:rPr kumimoji="1" lang="ja-JP" altLang="en-US" smtClean="0"/>
-              <a:t>2025/10/9</a:t>
+              <a:t>2025/12/10</a:t>
             </a:fld>
             <a:endParaRPr kumimoji="1" lang="ja-JP" altLang="en-US"/>
           </a:p>
@@ -5393,7 +5394,7 @@
           <a:p>
             <a:fld id="{021EE310-EC55-4FE5-9459-5D3CEDE369C6}" type="datetimeFigureOut">
               <a:rPr kumimoji="1" lang="ja-JP" altLang="en-US" smtClean="0"/>
-              <a:t>2025/10/9</a:t>
+              <a:t>2025/12/10</a:t>
             </a:fld>
             <a:endParaRPr kumimoji="1" lang="ja-JP" altLang="en-US"/>
           </a:p>
@@ -5854,7 +5855,7 @@
           <a:p>
             <a:fld id="{021EE310-EC55-4FE5-9459-5D3CEDE369C6}" type="datetimeFigureOut">
               <a:rPr kumimoji="1" lang="ja-JP" altLang="en-US" smtClean="0"/>
-              <a:t>2025/10/9</a:t>
+              <a:t>2025/12/10</a:t>
             </a:fld>
             <a:endParaRPr kumimoji="1" lang="ja-JP" altLang="en-US"/>
           </a:p>
@@ -6394,7 +6395,7 @@
         </p:nvSpPr>
         <p:spPr>
           <a:xfrm>
-            <a:off x="1524000" y="1214438"/>
+            <a:off x="1423416" y="2028254"/>
             <a:ext cx="9144000" cy="2387600"/>
           </a:xfrm>
         </p:spPr>
@@ -6402,9 +6403,129 @@
           <a:bodyPr/>
           <a:lstStyle/>
           <a:p>
+            <a:pPr algn="ctr"/>
             <a:r>
               <a:rPr kumimoji="1" lang="ja-JP" altLang="en-US" dirty="0" smtClean="0"/>
-              <a:t>ゲーム制作企画書</a:t>
+              <a:t>わんわん</a:t>
+            </a:r>
+            <a:r>
+              <a:rPr kumimoji="1" lang="en-US" altLang="ja-JP" dirty="0" smtClean="0"/>
+              <a:t/>
+            </a:r>
+            <a:br>
+              <a:rPr kumimoji="1" lang="en-US" altLang="ja-JP" dirty="0" smtClean="0"/>
+            </a:br>
+            <a:r>
+              <a:rPr kumimoji="1" lang="ja-JP" altLang="en-US" dirty="0" smtClean="0"/>
+              <a:t>宇宙迎撃作戦</a:t>
+            </a:r>
+            <a:r>
+              <a:rPr kumimoji="1" lang="en-US" altLang="ja-JP" dirty="0" smtClean="0"/>
+              <a:t/>
+            </a:r>
+            <a:br>
+              <a:rPr kumimoji="1" lang="en-US" altLang="ja-JP" dirty="0" smtClean="0"/>
+            </a:br>
+            <a:r>
+              <a:rPr lang="ja-JP" altLang="en-US" dirty="0">
+                <a:solidFill>
+                  <a:srgbClr val="FF0000"/>
+                </a:solidFill>
+              </a:rPr>
+              <a:t>企画書</a:t>
+            </a:r>
+            <a:endParaRPr kumimoji="1" lang="ja-JP" altLang="en-US" dirty="0">
+              <a:solidFill>
+                <a:srgbClr val="FF0000"/>
+              </a:solidFill>
+            </a:endParaRPr>
+          </a:p>
+        </p:txBody>
+      </p:sp>
+      <p:sp>
+        <p:nvSpPr>
+          <p:cNvPr id="4" name="テキスト ボックス 3"/>
+          <p:cNvSpPr txBox="1"/>
+          <p:nvPr/>
+        </p:nvSpPr>
+        <p:spPr>
+          <a:xfrm>
+            <a:off x="2807208" y="4718304"/>
+            <a:ext cx="5896166" cy="1477328"/>
+          </a:xfrm>
+          <a:prstGeom prst="rect">
+            <a:avLst/>
+          </a:prstGeom>
+          <a:noFill/>
+        </p:spPr>
+        <p:txBody>
+          <a:bodyPr wrap="none" rtlCol="0">
+            <a:spAutoFit/>
+          </a:bodyPr>
+          <a:lstStyle/>
+          <a:p>
+            <a:r>
+              <a:rPr kumimoji="1" lang="ja-JP" altLang="en-US" dirty="0" smtClean="0"/>
+              <a:t>名前：坂口　耕汰</a:t>
+            </a:r>
+            <a:endParaRPr kumimoji="1" lang="en-US" altLang="ja-JP" dirty="0" smtClean="0"/>
+          </a:p>
+          <a:p>
+            <a:r>
+              <a:rPr lang="ja-JP" altLang="en-US" dirty="0" smtClean="0"/>
+              <a:t>ゲームジャンル：３</a:t>
+            </a:r>
+            <a:r>
+              <a:rPr lang="en-US" altLang="ja-JP" dirty="0" smtClean="0"/>
+              <a:t>D</a:t>
+            </a:r>
+            <a:r>
+              <a:rPr lang="ja-JP" altLang="en-US" dirty="0" smtClean="0"/>
+              <a:t>サードパーソンアクションゲーム</a:t>
+            </a:r>
+            <a:endParaRPr kumimoji="1" lang="en-US" altLang="ja-JP" dirty="0" smtClean="0"/>
+          </a:p>
+          <a:p>
+            <a:r>
+              <a:rPr kumimoji="1" lang="ja-JP" altLang="en-US" dirty="0" smtClean="0"/>
+              <a:t>使用エンジン：</a:t>
+            </a:r>
+            <a:r>
+              <a:rPr kumimoji="1" lang="en-US" altLang="ja-JP" dirty="0" smtClean="0"/>
+              <a:t>Unreal</a:t>
+            </a:r>
+            <a:r>
+              <a:rPr kumimoji="1" lang="ja-JP" altLang="en-US" dirty="0" smtClean="0"/>
+              <a:t>　</a:t>
+            </a:r>
+            <a:r>
+              <a:rPr kumimoji="1" lang="en-US" altLang="ja-JP" dirty="0" smtClean="0"/>
+              <a:t>version5.5</a:t>
+            </a:r>
+          </a:p>
+          <a:p>
+            <a:r>
+              <a:rPr lang="ja-JP" altLang="en-US" dirty="0"/>
+              <a:t>使用</a:t>
+            </a:r>
+            <a:r>
+              <a:rPr lang="ja-JP" altLang="en-US" dirty="0" smtClean="0"/>
+              <a:t>ハード</a:t>
+            </a:r>
+            <a:r>
+              <a:rPr lang="en-US" altLang="ja-JP" dirty="0" smtClean="0"/>
+              <a:t>:</a:t>
+            </a:r>
+            <a:r>
+              <a:rPr lang="ja-JP" altLang="en-US" dirty="0" smtClean="0"/>
+              <a:t>パソコン</a:t>
+            </a:r>
+            <a:endParaRPr lang="en-US" altLang="ja-JP" dirty="0" smtClean="0"/>
+          </a:p>
+          <a:p>
+            <a:r>
+              <a:rPr lang="ja-JP" altLang="en-US" dirty="0" smtClean="0"/>
+              <a:t>プレイ人数：１人</a:t>
             </a:r>
             <a:endParaRPr kumimoji="1" lang="ja-JP" altLang="en-US" dirty="0"/>
           </a:p>
@@ -6412,24 +6533,47 @@
       </p:sp>
       <p:sp>
         <p:nvSpPr>
-          <p:cNvPr id="3" name="サブタイトル 2"/>
-          <p:cNvSpPr>
-            <a:spLocks noGrp="1"/>
-          </p:cNvSpPr>
-          <p:nvPr>
-            <p:ph type="subTitle" idx="1"/>
-          </p:nvPr>
-        </p:nvSpPr>
-        <p:spPr/>
-        <p:txBody>
-          <a:bodyPr/>
+          <p:cNvPr id="5" name="正方形/長方形 4"/>
+          <p:cNvSpPr/>
+          <p:nvPr/>
+        </p:nvSpPr>
+        <p:spPr>
+          <a:xfrm>
+            <a:off x="2734056" y="4718304"/>
+            <a:ext cx="6181344" cy="1673352"/>
+          </a:xfrm>
+          <a:prstGeom prst="rect">
+            <a:avLst/>
+          </a:prstGeom>
+          <a:noFill/>
+          <a:ln>
+            <a:solidFill>
+              <a:schemeClr val="bg1"/>
+            </a:solidFill>
+          </a:ln>
+        </p:spPr>
+        <p:style>
+          <a:lnRef idx="2">
+            <a:schemeClr val="accent1">
+              <a:shade val="50000"/>
+            </a:schemeClr>
+          </a:lnRef>
+          <a:fillRef idx="1">
+            <a:schemeClr val="accent1"/>
+          </a:fillRef>
+          <a:effectRef idx="0">
+            <a:schemeClr val="accent1"/>
+          </a:effectRef>
+          <a:fontRef idx="minor">
+            <a:schemeClr val="lt1"/>
+          </a:fontRef>
+        </p:style>
+        <p:txBody>
+          <a:bodyPr rtlCol="0" anchor="ctr"/>
           <a:lstStyle/>
           <a:p>
-            <a:r>
-              <a:rPr kumimoji="1" lang="ja-JP" altLang="en-US" dirty="0" smtClean="0"/>
-              <a:t>坂口　耕汰</a:t>
-            </a:r>
-            <a:endParaRPr kumimoji="1" lang="ja-JP" altLang="en-US" dirty="0"/>
+            <a:pPr algn="ctr"/>
+            <a:endParaRPr kumimoji="1" lang="ja-JP" altLang="en-US"/>
           </a:p>
         </p:txBody>
       </p:sp>
@@ -6531,8 +6675,16 @@
           <a:lstStyle/>
           <a:p>
             <a:r>
+              <a:rPr lang="ja-JP" altLang="en-US" sz="2200" u="sng" dirty="0"/>
+              <a:t>かわいい</a:t>
+            </a:r>
+            <a:r>
               <a:rPr lang="ja-JP" altLang="en-US" sz="2200" u="sng" dirty="0" smtClean="0"/>
-              <a:t>武装した犬がエイリアンと戦う、惑星環境ギミック付きサードパーソン・アクションゲーム</a:t>
+              <a:t>犬</a:t>
+            </a:r>
+            <a:r>
+              <a:rPr lang="ja-JP" altLang="en-US" sz="2200" u="sng" dirty="0" smtClean="0"/>
+              <a:t>がエイリアンと戦う、惑星環境ギミック付きサードパーソン・アクションゲーム</a:t>
             </a:r>
             <a:endParaRPr kumimoji="1" lang="ja-JP" altLang="en-US" sz="2200" u="sng" dirty="0"/>
           </a:p>
@@ -6547,7 +6699,7 @@
         <p:spPr>
           <a:xfrm>
             <a:off x="338447" y="2541320"/>
-            <a:ext cx="11572399" cy="3046988"/>
+            <a:ext cx="11572399" cy="2677656"/>
           </a:xfrm>
           <a:prstGeom prst="rect">
             <a:avLst/>
@@ -6570,7 +6722,11 @@
             </a:r>
             <a:r>
               <a:rPr lang="ja-JP" altLang="en-US" sz="2400" dirty="0" smtClean="0"/>
-              <a:t>で緊張感と敵を殲滅してクリアする爽快感がある</a:t>
+              <a:t>で緊張感と敵を殲滅してクリアする爽快感が</a:t>
+            </a:r>
+            <a:r>
+              <a:rPr lang="ja-JP" altLang="en-US" sz="2400" dirty="0" smtClean="0"/>
+              <a:t>あるがあります</a:t>
             </a:r>
             <a:endParaRPr lang="en-US" altLang="ja-JP" sz="2400" dirty="0" smtClean="0"/>
           </a:p>
@@ -6580,7 +6736,11 @@
           <a:p>
             <a:r>
               <a:rPr lang="ja-JP" altLang="en-US" sz="2400" dirty="0" smtClean="0"/>
-              <a:t>・ステージクリア後にスコアが表示されるので、繰り返し遊ぶことができる</a:t>
+              <a:t>・ステージクリア後にスコアが表示されるので、繰り返し遊ぶことが</a:t>
+            </a:r>
+            <a:r>
+              <a:rPr lang="ja-JP" altLang="en-US" sz="2400" dirty="0" smtClean="0"/>
+              <a:t>できます</a:t>
             </a:r>
             <a:endParaRPr lang="en-US" altLang="ja-JP" sz="2400" dirty="0" smtClean="0"/>
           </a:p>
@@ -6590,14 +6750,15 @@
           <a:p>
             <a:r>
               <a:rPr lang="ja-JP" altLang="en-US" sz="2400" dirty="0" smtClean="0"/>
-              <a:t>・犬が主人公なのでかわいさと、</a:t>
-            </a:r>
-            <a:endParaRPr lang="en-US" altLang="ja-JP" sz="2400" dirty="0"/>
-          </a:p>
-          <a:p>
+              <a:t>・犬</a:t>
+            </a:r>
             <a:r>
               <a:rPr lang="ja-JP" altLang="en-US" sz="2400" dirty="0" smtClean="0"/>
-              <a:t>化学兵器が登場するかっこよさが同居しているので、幅広いプレイヤー層に刺さる</a:t>
+              <a:t>が主人公なので</a:t>
+            </a:r>
+            <a:r>
+              <a:rPr lang="ja-JP" altLang="en-US" sz="2400" dirty="0" smtClean="0"/>
+              <a:t>かわいさがあります</a:t>
             </a:r>
             <a:endParaRPr lang="en-US" altLang="ja-JP" sz="2400" dirty="0" smtClean="0"/>
           </a:p>
@@ -6607,7 +6768,15 @@
           <a:p>
             <a:r>
               <a:rPr lang="ja-JP" altLang="en-US" sz="2400" dirty="0" smtClean="0"/>
-              <a:t>・ステージごとに違うギミックにより攻略体験や、アイテム要素が戦略性がある</a:t>
+              <a:t>・ステージごとに違うギミックにより攻略</a:t>
+            </a:r>
+            <a:r>
+              <a:rPr lang="ja-JP" altLang="en-US" sz="2400" dirty="0" smtClean="0"/>
+              <a:t>体験</a:t>
+            </a:r>
+            <a:r>
+              <a:rPr lang="ja-JP" altLang="en-US" sz="2400" dirty="0" smtClean="0"/>
+              <a:t>ができます</a:t>
             </a:r>
             <a:endParaRPr lang="en-US" altLang="ja-JP" sz="2400" dirty="0" smtClean="0"/>
           </a:p>
@@ -6792,7 +6961,7 @@
         <p:spPr>
           <a:xfrm>
             <a:off x="897355" y="1681283"/>
-            <a:ext cx="8371459" cy="5016758"/>
+            <a:ext cx="8371459" cy="4093428"/>
           </a:xfrm>
           <a:prstGeom prst="rect">
             <a:avLst/>
@@ -6834,7 +7003,11 @@
           <a:p>
             <a:r>
               <a:rPr kumimoji="1" lang="ja-JP" altLang="en-US" sz="2000" dirty="0" smtClean="0"/>
-              <a:t>・ステージの敵をすべて倒すとゲームクリア</a:t>
+              <a:t>・制限時間</a:t>
+            </a:r>
+            <a:r>
+              <a:rPr lang="ja-JP" altLang="en-US" sz="2000" dirty="0" smtClean="0"/>
+              <a:t>まで生き残ればゲームクリア</a:t>
             </a:r>
             <a:endParaRPr kumimoji="1" lang="en-US" altLang="ja-JP" sz="2000" dirty="0" smtClean="0"/>
           </a:p>
@@ -6852,7 +7025,11 @@
             </a:r>
             <a:r>
               <a:rPr kumimoji="1" lang="ja-JP" altLang="en-US" sz="2000" dirty="0" smtClean="0"/>
-              <a:t>がなくなるか、制限時間が過ぎたらゲームオーバー</a:t>
+              <a:t>がなく</a:t>
+            </a:r>
+            <a:r>
+              <a:rPr kumimoji="1" lang="ja-JP" altLang="en-US" sz="2000" dirty="0" smtClean="0"/>
+              <a:t>なったらゲームオーバー</a:t>
             </a:r>
             <a:endParaRPr kumimoji="1" lang="en-US" altLang="ja-JP" sz="2000" dirty="0" smtClean="0"/>
           </a:p>
@@ -6862,7 +7039,11 @@
           <a:p>
             <a:r>
               <a:rPr kumimoji="1" lang="ja-JP" altLang="en-US" sz="2000" dirty="0" smtClean="0"/>
-              <a:t>・ステージによってギミックがある（重力が強くなりジャンプ力低下など）</a:t>
+              <a:t>・ステージによってギミックが</a:t>
+            </a:r>
+            <a:r>
+              <a:rPr kumimoji="1" lang="ja-JP" altLang="en-US" sz="2000" dirty="0" smtClean="0"/>
+              <a:t>ある</a:t>
             </a:r>
             <a:endParaRPr kumimoji="1" lang="en-US" altLang="ja-JP" sz="2000" dirty="0" smtClean="0"/>
           </a:p>
@@ -6872,31 +7053,21 @@
           <a:p>
             <a:r>
               <a:rPr kumimoji="1" lang="ja-JP" altLang="en-US" sz="2000" dirty="0" smtClean="0"/>
-              <a:t>・ステージは２～４個</a:t>
+              <a:t>・ステージ</a:t>
+            </a:r>
+            <a:r>
+              <a:rPr kumimoji="1" lang="ja-JP" altLang="en-US" sz="2000" dirty="0" smtClean="0"/>
+              <a:t>は４個</a:t>
             </a:r>
             <a:endParaRPr kumimoji="1" lang="en-US" altLang="ja-JP" sz="2000" dirty="0" smtClean="0"/>
           </a:p>
           <a:p>
-            <a:endParaRPr lang="en-US" altLang="ja-JP" sz="2000" dirty="0"/>
+            <a:endParaRPr kumimoji="1" lang="en-US" altLang="ja-JP" sz="2000" dirty="0"/>
           </a:p>
           <a:p>
             <a:r>
               <a:rPr lang="ja-JP" altLang="en-US" sz="2000" dirty="0" smtClean="0"/>
-              <a:t>・ステージにはアイテムがある（制限時間が伸びるなど）</a:t>
-            </a:r>
-            <a:endParaRPr lang="en-US" altLang="ja-JP" sz="2000" dirty="0" smtClean="0"/>
-          </a:p>
-          <a:p>
-            <a:endParaRPr kumimoji="1" lang="en-US" altLang="ja-JP" sz="2000" dirty="0"/>
-          </a:p>
-          <a:p>
-            <a:r>
-              <a:rPr lang="ja-JP" altLang="en-US" sz="2000" dirty="0" smtClean="0"/>
-              <a:t>・ステージクリア後にスコアが表示</a:t>
-            </a:r>
-            <a:r>
-              <a:rPr lang="ja-JP" altLang="en-US" sz="2000" dirty="0" smtClean="0"/>
-              <a:t>される</a:t>
+              <a:t>・ステージクリア後にスコアが表示される</a:t>
             </a:r>
             <a:endParaRPr lang="en-US" altLang="ja-JP" sz="2000" dirty="0" smtClean="0"/>
           </a:p>
@@ -6911,7 +7082,7 @@
         <p:spPr>
           <a:xfrm>
             <a:off x="335632" y="1201287"/>
-            <a:ext cx="9494907" cy="430887"/>
+            <a:ext cx="7520007" cy="430887"/>
           </a:xfrm>
           <a:prstGeom prst="rect">
             <a:avLst/>
@@ -6930,7 +7101,15 @@
             </a:r>
             <a:r>
               <a:rPr lang="ja-JP" altLang="en-US" sz="2200" u="sng" dirty="0"/>
-              <a:t>を主人公にして、兵器を駆使してエイリアンを倒し地球を守るゲーム</a:t>
+              <a:t>を主人公にして</a:t>
+            </a:r>
+            <a:r>
+              <a:rPr lang="ja-JP" altLang="en-US" sz="2200" u="sng" dirty="0" smtClean="0"/>
+              <a:t>、エイリアン</a:t>
+            </a:r>
+            <a:r>
+              <a:rPr lang="ja-JP" altLang="en-US" sz="2200" u="sng" dirty="0"/>
+              <a:t>を倒し地球を守るゲーム</a:t>
             </a:r>
             <a:endParaRPr kumimoji="1" lang="ja-JP" altLang="en-US" sz="2200" u="sng" dirty="0"/>
           </a:p>
@@ -7218,665 +7397,6 @@
           </a:p>
         </p:txBody>
       </p:sp>
-      <p:pic>
-        <p:nvPicPr>
-          <p:cNvPr id="9" name="図 8"/>
-          <p:cNvPicPr>
-            <a:picLocks noChangeAspect="1"/>
-          </p:cNvPicPr>
-          <p:nvPr/>
-        </p:nvPicPr>
-        <p:blipFill>
-          <a:blip r:embed="rId2" cstate="print">
-            <a:extLst>
-              <a:ext uri="{28A0092B-C50C-407E-A947-70E740481C1C}">
-                <a14:useLocalDpi xmlns:a14="http://schemas.microsoft.com/office/drawing/2010/main" val="0"/>
-              </a:ext>
-            </a:extLst>
-          </a:blip>
-          <a:stretch>
-            <a:fillRect/>
-          </a:stretch>
-        </p:blipFill>
-        <p:spPr>
-          <a:xfrm>
-            <a:off x="2826327" y="979715"/>
-            <a:ext cx="5848597" cy="3899065"/>
-          </a:xfrm>
-          <a:prstGeom prst="rect">
-            <a:avLst/>
-          </a:prstGeom>
-        </p:spPr>
-      </p:pic>
-      <p:sp>
-        <p:nvSpPr>
-          <p:cNvPr id="10" name="テキスト ボックス 9"/>
-          <p:cNvSpPr txBox="1"/>
-          <p:nvPr/>
-        </p:nvSpPr>
-        <p:spPr>
-          <a:xfrm>
-            <a:off x="3865418" y="4378661"/>
-            <a:ext cx="3877985" cy="584775"/>
-          </a:xfrm>
-          <a:prstGeom prst="rect">
-            <a:avLst/>
-          </a:prstGeom>
-          <a:noFill/>
-        </p:spPr>
-        <p:txBody>
-          <a:bodyPr wrap="none" rtlCol="0">
-            <a:spAutoFit/>
-          </a:bodyPr>
-          <a:lstStyle/>
-          <a:p>
-            <a:r>
-              <a:rPr kumimoji="1" lang="ja-JP" altLang="en-US" sz="3200" dirty="0" smtClean="0"/>
-              <a:t>（画像はイメージ）</a:t>
-            </a:r>
-            <a:endParaRPr kumimoji="1" lang="ja-JP" altLang="en-US" sz="3200" dirty="0"/>
-          </a:p>
-        </p:txBody>
-      </p:sp>
-      <p:sp>
-        <p:nvSpPr>
-          <p:cNvPr id="12" name="テキスト ボックス 11"/>
-          <p:cNvSpPr txBox="1"/>
-          <p:nvPr/>
-        </p:nvSpPr>
-        <p:spPr>
-          <a:xfrm>
-            <a:off x="510639" y="1353787"/>
-            <a:ext cx="1582484" cy="584775"/>
-          </a:xfrm>
-          <a:prstGeom prst="rect">
-            <a:avLst/>
-          </a:prstGeom>
-          <a:noFill/>
-        </p:spPr>
-        <p:txBody>
-          <a:bodyPr wrap="none" rtlCol="0">
-            <a:spAutoFit/>
-          </a:bodyPr>
-          <a:lstStyle/>
-          <a:p>
-            <a:r>
-              <a:rPr kumimoji="1" lang="en-US" altLang="ja-JP" sz="3200" dirty="0" smtClean="0"/>
-              <a:t>HP</a:t>
-            </a:r>
-            <a:r>
-              <a:rPr kumimoji="1" lang="ja-JP" altLang="en-US" sz="3200" dirty="0" smtClean="0"/>
-              <a:t>バー</a:t>
-            </a:r>
-            <a:endParaRPr kumimoji="1" lang="ja-JP" altLang="en-US" sz="3200" dirty="0"/>
-          </a:p>
-        </p:txBody>
-      </p:sp>
-      <p:sp>
-        <p:nvSpPr>
-          <p:cNvPr id="14" name="正方形/長方形 13"/>
-          <p:cNvSpPr/>
-          <p:nvPr/>
-        </p:nvSpPr>
-        <p:spPr>
-          <a:xfrm>
-            <a:off x="430481" y="1384623"/>
-            <a:ext cx="1721922" cy="1240971"/>
-          </a:xfrm>
-          <a:prstGeom prst="rect">
-            <a:avLst/>
-          </a:prstGeom>
-          <a:noFill/>
-          <a:ln>
-            <a:solidFill>
-              <a:schemeClr val="bg1"/>
-            </a:solidFill>
-          </a:ln>
-        </p:spPr>
-        <p:style>
-          <a:lnRef idx="2">
-            <a:schemeClr val="accent1">
-              <a:shade val="50000"/>
-            </a:schemeClr>
-          </a:lnRef>
-          <a:fillRef idx="1">
-            <a:schemeClr val="accent1"/>
-          </a:fillRef>
-          <a:effectRef idx="0">
-            <a:schemeClr val="accent1"/>
-          </a:effectRef>
-          <a:fontRef idx="minor">
-            <a:schemeClr val="lt1"/>
-          </a:fontRef>
-        </p:style>
-        <p:txBody>
-          <a:bodyPr rtlCol="0" anchor="ctr"/>
-          <a:lstStyle/>
-          <a:p>
-            <a:pPr algn="ctr"/>
-            <a:endParaRPr kumimoji="1" lang="ja-JP" altLang="en-US"/>
-          </a:p>
-        </p:txBody>
-      </p:sp>
-      <p:sp>
-        <p:nvSpPr>
-          <p:cNvPr id="17" name="上矢印 16"/>
-          <p:cNvSpPr/>
-          <p:nvPr/>
-        </p:nvSpPr>
-        <p:spPr>
-          <a:xfrm rot="5400000">
-            <a:off x="2119745" y="868563"/>
-            <a:ext cx="445325" cy="967839"/>
-          </a:xfrm>
-          <a:prstGeom prst="upArrow">
-            <a:avLst/>
-          </a:prstGeom>
-          <a:solidFill>
-            <a:srgbClr val="FF0000"/>
-          </a:solidFill>
-        </p:spPr>
-        <p:style>
-          <a:lnRef idx="2">
-            <a:schemeClr val="accent1">
-              <a:shade val="50000"/>
-            </a:schemeClr>
-          </a:lnRef>
-          <a:fillRef idx="1">
-            <a:schemeClr val="accent1"/>
-          </a:fillRef>
-          <a:effectRef idx="0">
-            <a:schemeClr val="accent1"/>
-          </a:effectRef>
-          <a:fontRef idx="minor">
-            <a:schemeClr val="lt1"/>
-          </a:fontRef>
-        </p:style>
-        <p:txBody>
-          <a:bodyPr rtlCol="0" anchor="ctr"/>
-          <a:lstStyle/>
-          <a:p>
-            <a:pPr algn="ctr"/>
-            <a:endParaRPr kumimoji="1" lang="ja-JP" altLang="en-US"/>
-          </a:p>
-        </p:txBody>
-      </p:sp>
-      <p:sp>
-        <p:nvSpPr>
-          <p:cNvPr id="18" name="テキスト ボックス 17"/>
-          <p:cNvSpPr txBox="1"/>
-          <p:nvPr/>
-        </p:nvSpPr>
-        <p:spPr>
-          <a:xfrm>
-            <a:off x="4720442" y="322160"/>
-            <a:ext cx="1826141" cy="584775"/>
-          </a:xfrm>
-          <a:prstGeom prst="rect">
-            <a:avLst/>
-          </a:prstGeom>
-          <a:noFill/>
-        </p:spPr>
-        <p:txBody>
-          <a:bodyPr wrap="none" rtlCol="0">
-            <a:spAutoFit/>
-          </a:bodyPr>
-          <a:lstStyle/>
-          <a:p>
-            <a:r>
-              <a:rPr kumimoji="1" lang="ja-JP" altLang="en-US" sz="3200" dirty="0" smtClean="0"/>
-              <a:t>制限時間</a:t>
-            </a:r>
-            <a:endParaRPr kumimoji="1" lang="ja-JP" altLang="en-US" sz="3200" dirty="0"/>
-          </a:p>
-        </p:txBody>
-      </p:sp>
-      <p:sp>
-        <p:nvSpPr>
-          <p:cNvPr id="20" name="正方形/長方形 19"/>
-          <p:cNvSpPr/>
-          <p:nvPr/>
-        </p:nvSpPr>
-        <p:spPr>
-          <a:xfrm>
-            <a:off x="4366438" y="11264"/>
-            <a:ext cx="2476005" cy="914401"/>
-          </a:xfrm>
-          <a:prstGeom prst="rect">
-            <a:avLst/>
-          </a:prstGeom>
-          <a:noFill/>
-          <a:ln>
-            <a:solidFill>
-              <a:schemeClr val="bg1"/>
-            </a:solidFill>
-          </a:ln>
-        </p:spPr>
-        <p:style>
-          <a:lnRef idx="2">
-            <a:schemeClr val="accent1">
-              <a:shade val="50000"/>
-            </a:schemeClr>
-          </a:lnRef>
-          <a:fillRef idx="1">
-            <a:schemeClr val="accent1"/>
-          </a:fillRef>
-          <a:effectRef idx="0">
-            <a:schemeClr val="accent1"/>
-          </a:effectRef>
-          <a:fontRef idx="minor">
-            <a:schemeClr val="lt1"/>
-          </a:fontRef>
-        </p:style>
-        <p:txBody>
-          <a:bodyPr rtlCol="0" anchor="ctr"/>
-          <a:lstStyle/>
-          <a:p>
-            <a:pPr algn="ctr"/>
-            <a:endParaRPr kumimoji="1" lang="ja-JP" altLang="en-US"/>
-          </a:p>
-        </p:txBody>
-      </p:sp>
-      <p:sp>
-        <p:nvSpPr>
-          <p:cNvPr id="21" name="右矢印 20"/>
-          <p:cNvSpPr/>
-          <p:nvPr/>
-        </p:nvSpPr>
-        <p:spPr>
-          <a:xfrm rot="5400000">
-            <a:off x="5414978" y="750182"/>
-            <a:ext cx="433787" cy="512166"/>
-          </a:xfrm>
-          <a:prstGeom prst="rightArrow">
-            <a:avLst/>
-          </a:prstGeom>
-          <a:solidFill>
-            <a:srgbClr val="FF0000"/>
-          </a:solidFill>
-        </p:spPr>
-        <p:style>
-          <a:lnRef idx="2">
-            <a:schemeClr val="accent1">
-              <a:shade val="50000"/>
-            </a:schemeClr>
-          </a:lnRef>
-          <a:fillRef idx="1">
-            <a:schemeClr val="accent1"/>
-          </a:fillRef>
-          <a:effectRef idx="0">
-            <a:schemeClr val="accent1"/>
-          </a:effectRef>
-          <a:fontRef idx="minor">
-            <a:schemeClr val="lt1"/>
-          </a:fontRef>
-        </p:style>
-        <p:txBody>
-          <a:bodyPr rtlCol="0" anchor="ctr"/>
-          <a:lstStyle/>
-          <a:p>
-            <a:pPr algn="ctr"/>
-            <a:endParaRPr kumimoji="1" lang="ja-JP" altLang="en-US"/>
-          </a:p>
-        </p:txBody>
-      </p:sp>
-      <p:sp>
-        <p:nvSpPr>
-          <p:cNvPr id="22" name="テキスト ボックス 21"/>
-          <p:cNvSpPr txBox="1"/>
-          <p:nvPr/>
-        </p:nvSpPr>
-        <p:spPr>
-          <a:xfrm>
-            <a:off x="9256815" y="1061399"/>
-            <a:ext cx="1415772" cy="584775"/>
-          </a:xfrm>
-          <a:prstGeom prst="rect">
-            <a:avLst/>
-          </a:prstGeom>
-          <a:noFill/>
-        </p:spPr>
-        <p:txBody>
-          <a:bodyPr wrap="none" rtlCol="0">
-            <a:spAutoFit/>
-          </a:bodyPr>
-          <a:lstStyle/>
-          <a:p>
-            <a:r>
-              <a:rPr kumimoji="1" lang="ja-JP" altLang="en-US" sz="3200" dirty="0" smtClean="0"/>
-              <a:t>スコア</a:t>
-            </a:r>
-            <a:endParaRPr kumimoji="1" lang="ja-JP" altLang="en-US" sz="3600" dirty="0"/>
-          </a:p>
-        </p:txBody>
-      </p:sp>
-      <p:sp>
-        <p:nvSpPr>
-          <p:cNvPr id="23" name="右矢印 22"/>
-          <p:cNvSpPr/>
-          <p:nvPr/>
-        </p:nvSpPr>
-        <p:spPr>
-          <a:xfrm rot="10800000">
-            <a:off x="8550234" y="1068779"/>
-            <a:ext cx="623454" cy="577395"/>
-          </a:xfrm>
-          <a:prstGeom prst="rightArrow">
-            <a:avLst/>
-          </a:prstGeom>
-          <a:solidFill>
-            <a:srgbClr val="FF0000"/>
-          </a:solidFill>
-        </p:spPr>
-        <p:style>
-          <a:lnRef idx="2">
-            <a:schemeClr val="accent1">
-              <a:shade val="50000"/>
-            </a:schemeClr>
-          </a:lnRef>
-          <a:fillRef idx="1">
-            <a:schemeClr val="accent1"/>
-          </a:fillRef>
-          <a:effectRef idx="0">
-            <a:schemeClr val="accent1"/>
-          </a:effectRef>
-          <a:fontRef idx="minor">
-            <a:schemeClr val="lt1"/>
-          </a:fontRef>
-        </p:style>
-        <p:txBody>
-          <a:bodyPr rtlCol="0" anchor="ctr"/>
-          <a:lstStyle/>
-          <a:p>
-            <a:pPr algn="ctr"/>
-            <a:endParaRPr kumimoji="1" lang="ja-JP" altLang="en-US"/>
-          </a:p>
-        </p:txBody>
-      </p:sp>
-      <p:sp>
-        <p:nvSpPr>
-          <p:cNvPr id="24" name="正方形/長方形 23"/>
-          <p:cNvSpPr/>
-          <p:nvPr/>
-        </p:nvSpPr>
-        <p:spPr>
-          <a:xfrm>
-            <a:off x="9173688" y="1061399"/>
-            <a:ext cx="1775361" cy="1278040"/>
-          </a:xfrm>
-          <a:prstGeom prst="rect">
-            <a:avLst/>
-          </a:prstGeom>
-          <a:noFill/>
-          <a:ln>
-            <a:solidFill>
-              <a:schemeClr val="bg1"/>
-            </a:solidFill>
-          </a:ln>
-        </p:spPr>
-        <p:style>
-          <a:lnRef idx="2">
-            <a:schemeClr val="accent1">
-              <a:shade val="50000"/>
-            </a:schemeClr>
-          </a:lnRef>
-          <a:fillRef idx="1">
-            <a:schemeClr val="accent1"/>
-          </a:fillRef>
-          <a:effectRef idx="0">
-            <a:schemeClr val="accent1"/>
-          </a:effectRef>
-          <a:fontRef idx="minor">
-            <a:schemeClr val="lt1"/>
-          </a:fontRef>
-        </p:style>
-        <p:txBody>
-          <a:bodyPr rtlCol="0" anchor="ctr"/>
-          <a:lstStyle/>
-          <a:p>
-            <a:pPr algn="ctr"/>
-            <a:endParaRPr kumimoji="1" lang="ja-JP" altLang="en-US"/>
-          </a:p>
-        </p:txBody>
-      </p:sp>
-      <p:sp>
-        <p:nvSpPr>
-          <p:cNvPr id="25" name="テキスト ボックス 24"/>
-          <p:cNvSpPr txBox="1"/>
-          <p:nvPr/>
-        </p:nvSpPr>
-        <p:spPr>
-          <a:xfrm>
-            <a:off x="438540" y="4912716"/>
-            <a:ext cx="3539714" cy="584775"/>
-          </a:xfrm>
-          <a:prstGeom prst="rect">
-            <a:avLst/>
-          </a:prstGeom>
-          <a:noFill/>
-        </p:spPr>
-        <p:txBody>
-          <a:bodyPr wrap="square" rtlCol="0">
-            <a:spAutoFit/>
-          </a:bodyPr>
-          <a:lstStyle/>
-          <a:p>
-            <a:r>
-              <a:rPr kumimoji="1" lang="ja-JP" altLang="en-US" sz="3200" dirty="0" smtClean="0"/>
-              <a:t>残り敵の数の表示</a:t>
-            </a:r>
-            <a:endParaRPr kumimoji="1" lang="ja-JP" altLang="en-US" sz="3200" dirty="0"/>
-          </a:p>
-        </p:txBody>
-      </p:sp>
-      <p:sp>
-        <p:nvSpPr>
-          <p:cNvPr id="26" name="正方形/長方形 25"/>
-          <p:cNvSpPr/>
-          <p:nvPr/>
-        </p:nvSpPr>
-        <p:spPr>
-          <a:xfrm>
-            <a:off x="430481" y="4909616"/>
-            <a:ext cx="3547774" cy="1097774"/>
-          </a:xfrm>
-          <a:prstGeom prst="rect">
-            <a:avLst/>
-          </a:prstGeom>
-          <a:noFill/>
-          <a:ln>
-            <a:solidFill>
-              <a:schemeClr val="bg1"/>
-            </a:solidFill>
-          </a:ln>
-        </p:spPr>
-        <p:style>
-          <a:lnRef idx="2">
-            <a:schemeClr val="accent1">
-              <a:shade val="50000"/>
-            </a:schemeClr>
-          </a:lnRef>
-          <a:fillRef idx="1">
-            <a:schemeClr val="accent1"/>
-          </a:fillRef>
-          <a:effectRef idx="0">
-            <a:schemeClr val="accent1"/>
-          </a:effectRef>
-          <a:fontRef idx="minor">
-            <a:schemeClr val="lt1"/>
-          </a:fontRef>
-        </p:style>
-        <p:txBody>
-          <a:bodyPr rtlCol="0" anchor="ctr"/>
-          <a:lstStyle/>
-          <a:p>
-            <a:pPr algn="ctr"/>
-            <a:endParaRPr kumimoji="1" lang="ja-JP" altLang="en-US"/>
-          </a:p>
-        </p:txBody>
-      </p:sp>
-      <p:sp>
-        <p:nvSpPr>
-          <p:cNvPr id="27" name="上矢印 26"/>
-          <p:cNvSpPr/>
-          <p:nvPr/>
-        </p:nvSpPr>
-        <p:spPr>
-          <a:xfrm>
-            <a:off x="3562964" y="4535676"/>
-            <a:ext cx="706236" cy="1389576"/>
-          </a:xfrm>
-          <a:prstGeom prst="upArrow">
-            <a:avLst>
-              <a:gd name="adj1" fmla="val 45103"/>
-              <a:gd name="adj2" fmla="val 50000"/>
-            </a:avLst>
-          </a:prstGeom>
-          <a:solidFill>
-            <a:srgbClr val="C00000"/>
-          </a:solidFill>
-        </p:spPr>
-        <p:style>
-          <a:lnRef idx="2">
-            <a:schemeClr val="accent1">
-              <a:shade val="50000"/>
-            </a:schemeClr>
-          </a:lnRef>
-          <a:fillRef idx="1">
-            <a:schemeClr val="accent1"/>
-          </a:fillRef>
-          <a:effectRef idx="0">
-            <a:schemeClr val="accent1"/>
-          </a:effectRef>
-          <a:fontRef idx="minor">
-            <a:schemeClr val="lt1"/>
-          </a:fontRef>
-        </p:style>
-        <p:txBody>
-          <a:bodyPr rtlCol="0" anchor="ctr"/>
-          <a:lstStyle/>
-          <a:p>
-            <a:pPr algn="ctr"/>
-            <a:endParaRPr kumimoji="1" lang="ja-JP" altLang="en-US"/>
-          </a:p>
-        </p:txBody>
-      </p:sp>
-      <p:sp>
-        <p:nvSpPr>
-          <p:cNvPr id="2" name="テキスト ボックス 1"/>
-          <p:cNvSpPr txBox="1"/>
-          <p:nvPr/>
-        </p:nvSpPr>
-        <p:spPr>
-          <a:xfrm>
-            <a:off x="8861961" y="4878780"/>
-            <a:ext cx="2236510" cy="584775"/>
-          </a:xfrm>
-          <a:prstGeom prst="rect">
-            <a:avLst/>
-          </a:prstGeom>
-          <a:noFill/>
-        </p:spPr>
-        <p:txBody>
-          <a:bodyPr wrap="none" rtlCol="0">
-            <a:spAutoFit/>
-          </a:bodyPr>
-          <a:lstStyle/>
-          <a:p>
-            <a:r>
-              <a:rPr kumimoji="1" lang="ja-JP" altLang="en-US" sz="3200" dirty="0" smtClean="0"/>
-              <a:t>残りの弾数</a:t>
-            </a:r>
-            <a:endParaRPr kumimoji="1" lang="ja-JP" altLang="en-US" sz="3200" dirty="0"/>
-          </a:p>
-        </p:txBody>
-      </p:sp>
-      <p:sp>
-        <p:nvSpPr>
-          <p:cNvPr id="3" name="正方形/長方形 2"/>
-          <p:cNvSpPr/>
-          <p:nvPr/>
-        </p:nvSpPr>
-        <p:spPr>
-          <a:xfrm>
-            <a:off x="8861961" y="4878780"/>
-            <a:ext cx="2937387" cy="1244434"/>
-          </a:xfrm>
-          <a:prstGeom prst="rect">
-            <a:avLst/>
-          </a:prstGeom>
-          <a:noFill/>
-          <a:ln>
-            <a:solidFill>
-              <a:schemeClr val="bg1"/>
-            </a:solidFill>
-          </a:ln>
-        </p:spPr>
-        <p:style>
-          <a:lnRef idx="2">
-            <a:schemeClr val="accent1">
-              <a:shade val="50000"/>
-            </a:schemeClr>
-          </a:lnRef>
-          <a:fillRef idx="1">
-            <a:schemeClr val="accent1"/>
-          </a:fillRef>
-          <a:effectRef idx="0">
-            <a:schemeClr val="accent1"/>
-          </a:effectRef>
-          <a:fontRef idx="minor">
-            <a:schemeClr val="lt1"/>
-          </a:fontRef>
-        </p:style>
-        <p:txBody>
-          <a:bodyPr rtlCol="0" anchor="ctr"/>
-          <a:lstStyle/>
-          <a:p>
-            <a:pPr algn="ctr"/>
-            <a:endParaRPr kumimoji="1" lang="ja-JP" altLang="en-US"/>
-          </a:p>
-        </p:txBody>
-      </p:sp>
-      <p:sp>
-        <p:nvSpPr>
-          <p:cNvPr id="4" name="左矢印 3"/>
-          <p:cNvSpPr/>
-          <p:nvPr/>
-        </p:nvSpPr>
-        <p:spPr>
-          <a:xfrm>
-            <a:off x="8705465" y="4451019"/>
-            <a:ext cx="702663" cy="427760"/>
-          </a:xfrm>
-          <a:prstGeom prst="leftArrow">
-            <a:avLst/>
-          </a:prstGeom>
-        </p:spPr>
-        <p:style>
-          <a:lnRef idx="2">
-            <a:schemeClr val="accent1">
-              <a:shade val="50000"/>
-            </a:schemeClr>
-          </a:lnRef>
-          <a:fillRef idx="1">
-            <a:schemeClr val="accent1"/>
-          </a:fillRef>
-          <a:effectRef idx="0">
-            <a:schemeClr val="accent1"/>
-          </a:effectRef>
-          <a:fontRef idx="minor">
-            <a:schemeClr val="lt1"/>
-          </a:fontRef>
-        </p:style>
-        <p:txBody>
-          <a:bodyPr rtlCol="0" anchor="ctr"/>
-          <a:lstStyle/>
-          <a:p>
-            <a:pPr algn="ctr"/>
-            <a:endParaRPr kumimoji="1" lang="ja-JP" altLang="en-US"/>
-          </a:p>
-        </p:txBody>
-      </p:sp>
     </p:spTree>
     <p:extLst>
       <p:ext uri="{BB962C8B-B14F-4D97-AF65-F5344CB8AC3E}">
@@ -7894,6 +7414,120 @@
       </p:par>
     </p:tnLst>
   </p:timing>
+</p:sld>
+</file>
+
+<file path=ppt/slides/slide5.xml><?xml version="1.0" encoding="utf-8"?>
+<p:sld xmlns:a="http://schemas.openxmlformats.org/drawingml/2006/main" xmlns:r="http://schemas.openxmlformats.org/officeDocument/2006/relationships" xmlns:p="http://schemas.openxmlformats.org/presentationml/2006/main">
+  <p:cSld>
+    <p:spTree>
+      <p:nvGrpSpPr>
+        <p:cNvPr id="1" name=""/>
+        <p:cNvGrpSpPr/>
+        <p:nvPr/>
+      </p:nvGrpSpPr>
+      <p:grpSpPr>
+        <a:xfrm>
+          <a:off x="0" y="0"/>
+          <a:ext cx="0" cy="0"/>
+          <a:chOff x="0" y="0"/>
+          <a:chExt cx="0" cy="0"/>
+        </a:xfrm>
+      </p:grpSpPr>
+      <p:sp>
+        <p:nvSpPr>
+          <p:cNvPr id="4" name="テキスト ボックス 3"/>
+          <p:cNvSpPr txBox="1"/>
+          <p:nvPr/>
+        </p:nvSpPr>
+        <p:spPr>
+          <a:xfrm>
+            <a:off x="374904" y="347472"/>
+            <a:ext cx="3429000" cy="707886"/>
+          </a:xfrm>
+          <a:prstGeom prst="rect">
+            <a:avLst/>
+          </a:prstGeom>
+          <a:noFill/>
+        </p:spPr>
+        <p:txBody>
+          <a:bodyPr wrap="square" rtlCol="0">
+            <a:spAutoFit/>
+          </a:bodyPr>
+          <a:lstStyle/>
+          <a:p>
+            <a:r>
+              <a:rPr lang="ja-JP" altLang="en-US" sz="4000" dirty="0" smtClean="0">
+                <a:solidFill>
+                  <a:srgbClr val="FF0000"/>
+                </a:solidFill>
+              </a:rPr>
+              <a:t>遊び方・説明</a:t>
+            </a:r>
+            <a:endParaRPr kumimoji="1" lang="ja-JP" altLang="en-US" sz="4000" dirty="0">
+              <a:solidFill>
+                <a:srgbClr val="FF0000"/>
+              </a:solidFill>
+            </a:endParaRPr>
+          </a:p>
+        </p:txBody>
+      </p:sp>
+      <p:sp>
+        <p:nvSpPr>
+          <p:cNvPr id="5" name="正方形/長方形 4"/>
+          <p:cNvSpPr/>
+          <p:nvPr/>
+        </p:nvSpPr>
+        <p:spPr>
+          <a:xfrm>
+            <a:off x="402336" y="338328"/>
+            <a:ext cx="3145536" cy="722376"/>
+          </a:xfrm>
+          <a:prstGeom prst="rect">
+            <a:avLst/>
+          </a:prstGeom>
+          <a:noFill/>
+          <a:ln>
+            <a:solidFill>
+              <a:schemeClr val="tx1"/>
+            </a:solidFill>
+          </a:ln>
+        </p:spPr>
+        <p:style>
+          <a:lnRef idx="2">
+            <a:schemeClr val="accent1">
+              <a:shade val="50000"/>
+            </a:schemeClr>
+          </a:lnRef>
+          <a:fillRef idx="1">
+            <a:schemeClr val="accent1"/>
+          </a:fillRef>
+          <a:effectRef idx="0">
+            <a:schemeClr val="accent1"/>
+          </a:effectRef>
+          <a:fontRef idx="minor">
+            <a:schemeClr val="lt1"/>
+          </a:fontRef>
+        </p:style>
+        <p:txBody>
+          <a:bodyPr rtlCol="0" anchor="ctr"/>
+          <a:lstStyle/>
+          <a:p>
+            <a:pPr algn="ctr"/>
+            <a:endParaRPr kumimoji="1" lang="ja-JP" altLang="en-US"/>
+          </a:p>
+        </p:txBody>
+      </p:sp>
+    </p:spTree>
+    <p:extLst>
+      <p:ext uri="{BB962C8B-B14F-4D97-AF65-F5344CB8AC3E}">
+        <p14:creationId xmlns:p14="http://schemas.microsoft.com/office/powerpoint/2010/main" val="2228409102"/>
+      </p:ext>
+    </p:extLst>
+  </p:cSld>
+  <p:clrMapOvr>
+    <a:masterClrMapping/>
+  </p:clrMapOvr>
 </p:sld>
 </file>
 

--- a/ゲーム制作企画書.pptx
+++ b/ゲーム制作企画書.pptx
@@ -302,7 +302,7 @@
           <a:p>
             <a:fld id="{021EE310-EC55-4FE5-9459-5D3CEDE369C6}" type="datetimeFigureOut">
               <a:rPr kumimoji="1" lang="ja-JP" altLang="en-US" smtClean="0"/>
-              <a:t>2025/12/10</a:t>
+              <a:t>2025/12/11</a:t>
             </a:fld>
             <a:endParaRPr kumimoji="1" lang="ja-JP" altLang="en-US"/>
           </a:p>
@@ -577,7 +577,7 @@
           <a:p>
             <a:fld id="{021EE310-EC55-4FE5-9459-5D3CEDE369C6}" type="datetimeFigureOut">
               <a:rPr kumimoji="1" lang="ja-JP" altLang="en-US" smtClean="0"/>
-              <a:t>2025/12/10</a:t>
+              <a:t>2025/12/11</a:t>
             </a:fld>
             <a:endParaRPr kumimoji="1" lang="ja-JP" altLang="en-US"/>
           </a:p>
@@ -771,7 +771,7 @@
           <a:p>
             <a:fld id="{021EE310-EC55-4FE5-9459-5D3CEDE369C6}" type="datetimeFigureOut">
               <a:rPr kumimoji="1" lang="ja-JP" altLang="en-US" smtClean="0"/>
-              <a:t>2025/12/10</a:t>
+              <a:t>2025/12/11</a:t>
             </a:fld>
             <a:endParaRPr kumimoji="1" lang="ja-JP" altLang="en-US"/>
           </a:p>
@@ -1044,7 +1044,7 @@
           <a:p>
             <a:fld id="{021EE310-EC55-4FE5-9459-5D3CEDE369C6}" type="datetimeFigureOut">
               <a:rPr kumimoji="1" lang="ja-JP" altLang="en-US" smtClean="0"/>
-              <a:t>2025/12/10</a:t>
+              <a:t>2025/12/11</a:t>
             </a:fld>
             <a:endParaRPr kumimoji="1" lang="ja-JP" altLang="en-US"/>
           </a:p>
@@ -1385,7 +1385,7 @@
           <a:p>
             <a:fld id="{021EE310-EC55-4FE5-9459-5D3CEDE369C6}" type="datetimeFigureOut">
               <a:rPr kumimoji="1" lang="ja-JP" altLang="en-US" smtClean="0"/>
-              <a:t>2025/12/10</a:t>
+              <a:t>2025/12/11</a:t>
             </a:fld>
             <a:endParaRPr kumimoji="1" lang="ja-JP" altLang="en-US"/>
           </a:p>
@@ -2008,7 +2008,7 @@
           <a:p>
             <a:fld id="{021EE310-EC55-4FE5-9459-5D3CEDE369C6}" type="datetimeFigureOut">
               <a:rPr kumimoji="1" lang="ja-JP" altLang="en-US" smtClean="0"/>
-              <a:t>2025/12/10</a:t>
+              <a:t>2025/12/11</a:t>
             </a:fld>
             <a:endParaRPr kumimoji="1" lang="ja-JP" altLang="en-US"/>
           </a:p>
@@ -2868,7 +2868,7 @@
           <a:p>
             <a:fld id="{021EE310-EC55-4FE5-9459-5D3CEDE369C6}" type="datetimeFigureOut">
               <a:rPr kumimoji="1" lang="ja-JP" altLang="en-US" smtClean="0"/>
-              <a:t>2025/12/10</a:t>
+              <a:t>2025/12/11</a:t>
             </a:fld>
             <a:endParaRPr kumimoji="1" lang="ja-JP" altLang="en-US"/>
           </a:p>
@@ -3070,7 +3070,7 @@
           <a:p>
             <a:fld id="{021EE310-EC55-4FE5-9459-5D3CEDE369C6}" type="datetimeFigureOut">
               <a:rPr kumimoji="1" lang="ja-JP" altLang="en-US" smtClean="0"/>
-              <a:t>2025/12/10</a:t>
+              <a:t>2025/12/11</a:t>
             </a:fld>
             <a:endParaRPr kumimoji="1" lang="ja-JP" altLang="en-US"/>
           </a:p>
@@ -3282,7 +3282,7 @@
           <a:p>
             <a:fld id="{021EE310-EC55-4FE5-9459-5D3CEDE369C6}" type="datetimeFigureOut">
               <a:rPr kumimoji="1" lang="ja-JP" altLang="en-US" smtClean="0"/>
-              <a:t>2025/12/10</a:t>
+              <a:t>2025/12/11</a:t>
             </a:fld>
             <a:endParaRPr kumimoji="1" lang="ja-JP" altLang="en-US"/>
           </a:p>
@@ -3484,7 +3484,7 @@
           <a:p>
             <a:fld id="{021EE310-EC55-4FE5-9459-5D3CEDE369C6}" type="datetimeFigureOut">
               <a:rPr kumimoji="1" lang="ja-JP" altLang="en-US" smtClean="0"/>
-              <a:t>2025/12/10</a:t>
+              <a:t>2025/12/11</a:t>
             </a:fld>
             <a:endParaRPr kumimoji="1" lang="ja-JP" altLang="en-US"/>
           </a:p>
@@ -3731,7 +3731,7 @@
           <a:p>
             <a:fld id="{021EE310-EC55-4FE5-9459-5D3CEDE369C6}" type="datetimeFigureOut">
               <a:rPr kumimoji="1" lang="ja-JP" altLang="en-US" smtClean="0"/>
-              <a:t>2025/12/10</a:t>
+              <a:t>2025/12/11</a:t>
             </a:fld>
             <a:endParaRPr kumimoji="1" lang="ja-JP" altLang="en-US"/>
           </a:p>
@@ -4087,7 +4087,7 @@
           <a:p>
             <a:fld id="{021EE310-EC55-4FE5-9459-5D3CEDE369C6}" type="datetimeFigureOut">
               <a:rPr kumimoji="1" lang="ja-JP" altLang="en-US" smtClean="0"/>
-              <a:t>2025/12/10</a:t>
+              <a:t>2025/12/11</a:t>
             </a:fld>
             <a:endParaRPr kumimoji="1" lang="ja-JP" altLang="en-US"/>
           </a:p>
@@ -4595,7 +4595,7 @@
           <a:p>
             <a:fld id="{021EE310-EC55-4FE5-9459-5D3CEDE369C6}" type="datetimeFigureOut">
               <a:rPr kumimoji="1" lang="ja-JP" altLang="en-US" smtClean="0"/>
-              <a:t>2025/12/10</a:t>
+              <a:t>2025/12/11</a:t>
             </a:fld>
             <a:endParaRPr kumimoji="1" lang="ja-JP" altLang="en-US"/>
           </a:p>
@@ -4713,7 +4713,7 @@
           <a:p>
             <a:fld id="{021EE310-EC55-4FE5-9459-5D3CEDE369C6}" type="datetimeFigureOut">
               <a:rPr kumimoji="1" lang="ja-JP" altLang="en-US" smtClean="0"/>
-              <a:t>2025/12/10</a:t>
+              <a:t>2025/12/11</a:t>
             </a:fld>
             <a:endParaRPr kumimoji="1" lang="ja-JP" altLang="en-US"/>
           </a:p>
@@ -4808,7 +4808,7 @@
           <a:p>
             <a:fld id="{021EE310-EC55-4FE5-9459-5D3CEDE369C6}" type="datetimeFigureOut">
               <a:rPr kumimoji="1" lang="ja-JP" altLang="en-US" smtClean="0"/>
-              <a:t>2025/12/10</a:t>
+              <a:t>2025/12/11</a:t>
             </a:fld>
             <a:endParaRPr kumimoji="1" lang="ja-JP" altLang="en-US"/>
           </a:p>
@@ -5119,7 +5119,7 @@
           <a:p>
             <a:fld id="{021EE310-EC55-4FE5-9459-5D3CEDE369C6}" type="datetimeFigureOut">
               <a:rPr kumimoji="1" lang="ja-JP" altLang="en-US" smtClean="0"/>
-              <a:t>2025/12/10</a:t>
+              <a:t>2025/12/11</a:t>
             </a:fld>
             <a:endParaRPr kumimoji="1" lang="ja-JP" altLang="en-US"/>
           </a:p>
@@ -5394,7 +5394,7 @@
           <a:p>
             <a:fld id="{021EE310-EC55-4FE5-9459-5D3CEDE369C6}" type="datetimeFigureOut">
               <a:rPr kumimoji="1" lang="ja-JP" altLang="en-US" smtClean="0"/>
-              <a:t>2025/12/10</a:t>
+              <a:t>2025/12/11</a:t>
             </a:fld>
             <a:endParaRPr kumimoji="1" lang="ja-JP" altLang="en-US"/>
           </a:p>
@@ -5855,7 +5855,7 @@
           <a:p>
             <a:fld id="{021EE310-EC55-4FE5-9459-5D3CEDE369C6}" type="datetimeFigureOut">
               <a:rPr kumimoji="1" lang="ja-JP" altLang="en-US" smtClean="0"/>
-              <a:t>2025/12/10</a:t>
+              <a:t>2025/12/11</a:t>
             </a:fld>
             <a:endParaRPr kumimoji="1" lang="ja-JP" altLang="en-US"/>
           </a:p>
@@ -6680,11 +6680,7 @@
             </a:r>
             <a:r>
               <a:rPr lang="ja-JP" altLang="en-US" sz="2200" u="sng" dirty="0" smtClean="0"/>
-              <a:t>犬</a:t>
-            </a:r>
-            <a:r>
-              <a:rPr lang="ja-JP" altLang="en-US" sz="2200" u="sng" dirty="0" smtClean="0"/>
-              <a:t>がエイリアンと戦う、惑星環境ギミック付きサードパーソン・アクションゲーム</a:t>
+              <a:t>犬がエイリアンと戦う、惑星環境ギミック付きサードパーソン・アクションゲーム</a:t>
             </a:r>
             <a:endParaRPr kumimoji="1" lang="ja-JP" altLang="en-US" sz="2200" u="sng" dirty="0"/>
           </a:p>
@@ -6722,11 +6718,17 @@
             </a:r>
             <a:r>
               <a:rPr lang="ja-JP" altLang="en-US" sz="2400" dirty="0" smtClean="0"/>
-              <a:t>で緊張感と敵を殲滅してクリアする爽快感が</a:t>
-            </a:r>
+              <a:t>で緊張感と敵を殲滅してクリアする爽快感があるがあります</a:t>
+            </a:r>
+            <a:endParaRPr lang="en-US" altLang="ja-JP" sz="2400" dirty="0" smtClean="0"/>
+          </a:p>
+          <a:p>
+            <a:endParaRPr kumimoji="1" lang="en-US" altLang="ja-JP" sz="2400" dirty="0"/>
+          </a:p>
+          <a:p>
             <a:r>
               <a:rPr lang="ja-JP" altLang="en-US" sz="2400" dirty="0" smtClean="0"/>
-              <a:t>あるがあります</a:t>
+              <a:t>・ステージクリア後にスコアが表示されるので、繰り返し遊ぶことができます</a:t>
             </a:r>
             <a:endParaRPr lang="en-US" altLang="ja-JP" sz="2400" dirty="0" smtClean="0"/>
           </a:p>
@@ -6736,47 +6738,17 @@
           <a:p>
             <a:r>
               <a:rPr lang="ja-JP" altLang="en-US" sz="2400" dirty="0" smtClean="0"/>
-              <a:t>・ステージクリア後にスコアが表示されるので、繰り返し遊ぶことが</a:t>
-            </a:r>
+              <a:t>・犬が主人公なのでかわいさがあります</a:t>
+            </a:r>
+            <a:endParaRPr lang="en-US" altLang="ja-JP" sz="2400" dirty="0" smtClean="0"/>
+          </a:p>
+          <a:p>
+            <a:endParaRPr kumimoji="1" lang="en-US" altLang="ja-JP" sz="2400" dirty="0"/>
+          </a:p>
+          <a:p>
             <a:r>
               <a:rPr lang="ja-JP" altLang="en-US" sz="2400" dirty="0" smtClean="0"/>
-              <a:t>できます</a:t>
-            </a:r>
-            <a:endParaRPr lang="en-US" altLang="ja-JP" sz="2400" dirty="0" smtClean="0"/>
-          </a:p>
-          <a:p>
-            <a:endParaRPr kumimoji="1" lang="en-US" altLang="ja-JP" sz="2400" dirty="0"/>
-          </a:p>
-          <a:p>
-            <a:r>
-              <a:rPr lang="ja-JP" altLang="en-US" sz="2400" dirty="0" smtClean="0"/>
-              <a:t>・犬</a:t>
-            </a:r>
-            <a:r>
-              <a:rPr lang="ja-JP" altLang="en-US" sz="2400" dirty="0" smtClean="0"/>
-              <a:t>が主人公なので</a:t>
-            </a:r>
-            <a:r>
-              <a:rPr lang="ja-JP" altLang="en-US" sz="2400" dirty="0" smtClean="0"/>
-              <a:t>かわいさがあります</a:t>
-            </a:r>
-            <a:endParaRPr lang="en-US" altLang="ja-JP" sz="2400" dirty="0" smtClean="0"/>
-          </a:p>
-          <a:p>
-            <a:endParaRPr kumimoji="1" lang="en-US" altLang="ja-JP" sz="2400" dirty="0"/>
-          </a:p>
-          <a:p>
-            <a:r>
-              <a:rPr lang="ja-JP" altLang="en-US" sz="2400" dirty="0" smtClean="0"/>
-              <a:t>・ステージごとに違うギミックにより攻略</a:t>
-            </a:r>
-            <a:r>
-              <a:rPr lang="ja-JP" altLang="en-US" sz="2400" dirty="0" smtClean="0"/>
-              <a:t>体験</a:t>
-            </a:r>
-            <a:r>
-              <a:rPr lang="ja-JP" altLang="en-US" sz="2400" dirty="0" smtClean="0"/>
-              <a:t>ができます</a:t>
+              <a:t>・ステージごとに違うギミックにより攻略体験ができます</a:t>
             </a:r>
             <a:endParaRPr lang="en-US" altLang="ja-JP" sz="2400" dirty="0" smtClean="0"/>
           </a:p>
@@ -6984,7 +6956,11 @@
             </a:r>
             <a:r>
               <a:rPr kumimoji="1" lang="ja-JP" altLang="en-US" sz="2000" dirty="0" smtClean="0"/>
-              <a:t>のサードパーンアクションゲーム</a:t>
+              <a:t>の</a:t>
+            </a:r>
+            <a:r>
+              <a:rPr kumimoji="1" lang="ja-JP" altLang="en-US" sz="2000" dirty="0" smtClean="0"/>
+              <a:t>サードパーンアクションゲームです</a:t>
             </a:r>
             <a:endParaRPr kumimoji="1" lang="en-US" altLang="ja-JP" sz="2000" dirty="0" smtClean="0"/>
           </a:p>
@@ -6994,8 +6970,17 @@
           <a:p>
             <a:r>
               <a:rPr lang="ja-JP" altLang="en-US" sz="2000" dirty="0"/>
-              <a:t>・犬を指示して行う</a:t>
-            </a:r>
+              <a:t>・犬を指示</a:t>
+            </a:r>
+            <a:r>
+              <a:rPr lang="ja-JP" altLang="en-US" sz="2000" dirty="0" smtClean="0"/>
+              <a:t>して</a:t>
+            </a:r>
+            <a:r>
+              <a:rPr lang="ja-JP" altLang="en-US" sz="2000" dirty="0"/>
+              <a:t>行います</a:t>
+            </a:r>
+            <a:endParaRPr lang="ja-JP" altLang="en-US" sz="2000" dirty="0"/>
           </a:p>
           <a:p>
             <a:endParaRPr lang="en-US" altLang="ja-JP" sz="2000" dirty="0"/>
@@ -7007,7 +6992,11 @@
             </a:r>
             <a:r>
               <a:rPr lang="ja-JP" altLang="en-US" sz="2000" dirty="0" smtClean="0"/>
-              <a:t>まで生き残ればゲームクリア</a:t>
+              <a:t>まで生き残れば</a:t>
+            </a:r>
+            <a:r>
+              <a:rPr lang="ja-JP" altLang="en-US" sz="2000" dirty="0" smtClean="0"/>
+              <a:t>ゲームクリアです</a:t>
             </a:r>
             <a:endParaRPr kumimoji="1" lang="en-US" altLang="ja-JP" sz="2000" dirty="0" smtClean="0"/>
           </a:p>
@@ -7025,11 +7014,11 @@
             </a:r>
             <a:r>
               <a:rPr kumimoji="1" lang="ja-JP" altLang="en-US" sz="2000" dirty="0" smtClean="0"/>
-              <a:t>がなく</a:t>
+              <a:t>がなくなったら</a:t>
             </a:r>
             <a:r>
               <a:rPr kumimoji="1" lang="ja-JP" altLang="en-US" sz="2000" dirty="0" smtClean="0"/>
-              <a:t>なったらゲームオーバー</a:t>
+              <a:t>ゲームオーバーです</a:t>
             </a:r>
             <a:endParaRPr kumimoji="1" lang="en-US" altLang="ja-JP" sz="2000" dirty="0" smtClean="0"/>
           </a:p>
@@ -7039,11 +7028,15 @@
           <a:p>
             <a:r>
               <a:rPr kumimoji="1" lang="ja-JP" altLang="en-US" sz="2000" dirty="0" smtClean="0"/>
-              <a:t>・ステージによってギミックが</a:t>
+              <a:t>・ステージによってギミック</a:t>
             </a:r>
             <a:r>
               <a:rPr kumimoji="1" lang="ja-JP" altLang="en-US" sz="2000" dirty="0" smtClean="0"/>
-              <a:t>ある</a:t>
+              <a:t>が</a:t>
+            </a:r>
+            <a:r>
+              <a:rPr lang="ja-JP" altLang="en-US" sz="2000" dirty="0"/>
+              <a:t>あります</a:t>
             </a:r>
             <a:endParaRPr kumimoji="1" lang="en-US" altLang="ja-JP" sz="2000" dirty="0" smtClean="0"/>
           </a:p>
@@ -7053,11 +7046,11 @@
           <a:p>
             <a:r>
               <a:rPr kumimoji="1" lang="ja-JP" altLang="en-US" sz="2000" dirty="0" smtClean="0"/>
-              <a:t>・ステージ</a:t>
+              <a:t>・ステージは</a:t>
             </a:r>
             <a:r>
               <a:rPr kumimoji="1" lang="ja-JP" altLang="en-US" sz="2000" dirty="0" smtClean="0"/>
-              <a:t>は４個</a:t>
+              <a:t>４個あります</a:t>
             </a:r>
             <a:endParaRPr kumimoji="1" lang="en-US" altLang="ja-JP" sz="2000" dirty="0" smtClean="0"/>
           </a:p>
@@ -7067,7 +7060,11 @@
           <a:p>
             <a:r>
               <a:rPr lang="ja-JP" altLang="en-US" sz="2000" dirty="0" smtClean="0"/>
-              <a:t>・ステージクリア後にスコアが表示される</a:t>
+              <a:t>・ステージクリア後にスコアが表示</a:t>
+            </a:r>
+            <a:r>
+              <a:rPr lang="ja-JP" altLang="en-US" sz="2000" dirty="0" smtClean="0"/>
+              <a:t>されます</a:t>
             </a:r>
             <a:endParaRPr lang="en-US" altLang="ja-JP" sz="2000" dirty="0" smtClean="0"/>
           </a:p>
@@ -7397,6 +7394,837 @@
           </a:p>
         </p:txBody>
       </p:sp>
+      <p:pic>
+        <p:nvPicPr>
+          <p:cNvPr id="3" name="図 2"/>
+          <p:cNvPicPr>
+            <a:picLocks noChangeAspect="1"/>
+          </p:cNvPicPr>
+          <p:nvPr/>
+        </p:nvPicPr>
+        <p:blipFill rotWithShape="1">
+          <a:blip r:embed="rId2"/>
+          <a:srcRect r="-811"/>
+          <a:stretch/>
+        </p:blipFill>
+        <p:spPr>
+          <a:xfrm>
+            <a:off x="2291348" y="1434585"/>
+            <a:ext cx="6683180" cy="3600000"/>
+          </a:xfrm>
+          <a:prstGeom prst="rect">
+            <a:avLst/>
+          </a:prstGeom>
+        </p:spPr>
+      </p:pic>
+      <p:sp>
+        <p:nvSpPr>
+          <p:cNvPr id="4" name="正方形/長方形 3"/>
+          <p:cNvSpPr/>
+          <p:nvPr/>
+        </p:nvSpPr>
+        <p:spPr>
+          <a:xfrm>
+            <a:off x="2772508" y="1617785"/>
+            <a:ext cx="996462" cy="304800"/>
+          </a:xfrm>
+          <a:prstGeom prst="rect">
+            <a:avLst/>
+          </a:prstGeom>
+          <a:noFill/>
+          <a:ln>
+            <a:solidFill>
+              <a:schemeClr val="tx1">
+                <a:lumMod val="95000"/>
+              </a:schemeClr>
+            </a:solidFill>
+          </a:ln>
+        </p:spPr>
+        <p:style>
+          <a:lnRef idx="2">
+            <a:schemeClr val="accent1">
+              <a:shade val="50000"/>
+            </a:schemeClr>
+          </a:lnRef>
+          <a:fillRef idx="1">
+            <a:schemeClr val="accent1"/>
+          </a:fillRef>
+          <a:effectRef idx="0">
+            <a:schemeClr val="accent1"/>
+          </a:effectRef>
+          <a:fontRef idx="minor">
+            <a:schemeClr val="lt1"/>
+          </a:fontRef>
+        </p:style>
+        <p:txBody>
+          <a:bodyPr rtlCol="0" anchor="ctr"/>
+          <a:lstStyle/>
+          <a:p>
+            <a:pPr algn="ctr"/>
+            <a:endParaRPr kumimoji="1" lang="ja-JP" altLang="en-US"/>
+          </a:p>
+        </p:txBody>
+      </p:sp>
+      <p:cxnSp>
+        <p:nvCxnSpPr>
+          <p:cNvPr id="8" name="直線矢印コネクタ 7"/>
+          <p:cNvCxnSpPr>
+            <a:stCxn id="10" idx="3"/>
+          </p:cNvCxnSpPr>
+          <p:nvPr/>
+        </p:nvCxnSpPr>
+        <p:spPr>
+          <a:xfrm flipV="1">
+            <a:off x="2210590" y="1770186"/>
+            <a:ext cx="556056" cy="589306"/>
+          </a:xfrm>
+          <a:prstGeom prst="straightConnector1">
+            <a:avLst/>
+          </a:prstGeom>
+          <a:ln>
+            <a:tailEnd type="triangle"/>
+          </a:ln>
+        </p:spPr>
+        <p:style>
+          <a:lnRef idx="3">
+            <a:schemeClr val="accent3"/>
+          </a:lnRef>
+          <a:fillRef idx="0">
+            <a:schemeClr val="accent3"/>
+          </a:fillRef>
+          <a:effectRef idx="2">
+            <a:schemeClr val="accent3"/>
+          </a:effectRef>
+          <a:fontRef idx="minor">
+            <a:schemeClr val="tx1"/>
+          </a:fontRef>
+        </p:style>
+      </p:cxnSp>
+      <p:sp>
+        <p:nvSpPr>
+          <p:cNvPr id="9" name="テキスト ボックス 8"/>
+          <p:cNvSpPr txBox="1"/>
+          <p:nvPr/>
+        </p:nvSpPr>
+        <p:spPr>
+          <a:xfrm>
+            <a:off x="347579" y="1334070"/>
+            <a:ext cx="1863011" cy="2031325"/>
+          </a:xfrm>
+          <a:prstGeom prst="rect">
+            <a:avLst/>
+          </a:prstGeom>
+          <a:noFill/>
+        </p:spPr>
+        <p:txBody>
+          <a:bodyPr wrap="none" rtlCol="0">
+            <a:spAutoFit/>
+          </a:bodyPr>
+          <a:lstStyle/>
+          <a:p>
+            <a:r>
+              <a:rPr kumimoji="1" lang="en-US" altLang="ja-JP" dirty="0" smtClean="0">
+                <a:solidFill>
+                  <a:schemeClr val="accent2"/>
+                </a:solidFill>
+              </a:rPr>
+              <a:t>HP</a:t>
+            </a:r>
+            <a:r>
+              <a:rPr kumimoji="1" lang="ja-JP" altLang="en-US" dirty="0" smtClean="0">
+                <a:solidFill>
+                  <a:schemeClr val="accent2"/>
+                </a:solidFill>
+              </a:rPr>
+              <a:t>と最大</a:t>
+            </a:r>
+            <a:r>
+              <a:rPr kumimoji="1" lang="en-US" altLang="ja-JP" dirty="0" smtClean="0">
+                <a:solidFill>
+                  <a:schemeClr val="accent2"/>
+                </a:solidFill>
+              </a:rPr>
+              <a:t>HP</a:t>
+            </a:r>
+          </a:p>
+          <a:p>
+            <a:r>
+              <a:rPr kumimoji="1" lang="ja-JP" altLang="en-US" dirty="0" smtClean="0"/>
+              <a:t>敵から攻撃を</a:t>
+            </a:r>
+            <a:endParaRPr kumimoji="1" lang="en-US" altLang="ja-JP" dirty="0" smtClean="0"/>
+          </a:p>
+          <a:p>
+            <a:r>
+              <a:rPr lang="ja-JP" altLang="en-US" dirty="0"/>
+              <a:t>食らう</a:t>
+            </a:r>
+            <a:r>
+              <a:rPr lang="ja-JP" altLang="en-US" dirty="0" smtClean="0"/>
+              <a:t>と</a:t>
+            </a:r>
+            <a:r>
+              <a:rPr lang="en-US" altLang="ja-JP" dirty="0" smtClean="0"/>
+              <a:t>-</a:t>
+            </a:r>
+            <a:r>
+              <a:rPr lang="ja-JP" altLang="en-US" dirty="0" smtClean="0"/>
+              <a:t>１０</a:t>
+            </a:r>
+            <a:endParaRPr lang="en-US" altLang="ja-JP" dirty="0" smtClean="0"/>
+          </a:p>
+          <a:p>
+            <a:r>
+              <a:rPr lang="ja-JP" altLang="en-US" dirty="0" smtClean="0"/>
+              <a:t>減り、</a:t>
+            </a:r>
+            <a:r>
+              <a:rPr lang="en-US" altLang="ja-JP" dirty="0" smtClean="0"/>
+              <a:t>HP</a:t>
+            </a:r>
+            <a:r>
+              <a:rPr lang="ja-JP" altLang="en-US" dirty="0" smtClean="0"/>
+              <a:t>が０に</a:t>
+            </a:r>
+            <a:endParaRPr lang="en-US" altLang="ja-JP" dirty="0" smtClean="0"/>
+          </a:p>
+          <a:p>
+            <a:r>
+              <a:rPr lang="ja-JP" altLang="en-US" dirty="0" smtClean="0"/>
+              <a:t>なったら</a:t>
+            </a:r>
+            <a:endParaRPr lang="en-US" altLang="ja-JP" dirty="0" smtClean="0"/>
+          </a:p>
+          <a:p>
+            <a:r>
+              <a:rPr lang="ja-JP" altLang="en-US" dirty="0" smtClean="0"/>
+              <a:t>ゲームオーバー</a:t>
+            </a:r>
+            <a:endParaRPr lang="en-US" altLang="ja-JP" dirty="0" smtClean="0"/>
+          </a:p>
+          <a:p>
+            <a:r>
+              <a:rPr lang="ja-JP" altLang="en-US" dirty="0" err="1"/>
+              <a:t>です</a:t>
+            </a:r>
+            <a:endParaRPr lang="en-US" altLang="ja-JP" dirty="0" smtClean="0"/>
+          </a:p>
+        </p:txBody>
+      </p:sp>
+      <p:sp>
+        <p:nvSpPr>
+          <p:cNvPr id="10" name="正方形/長方形 9"/>
+          <p:cNvSpPr/>
+          <p:nvPr/>
+        </p:nvSpPr>
+        <p:spPr>
+          <a:xfrm>
+            <a:off x="266821" y="1302023"/>
+            <a:ext cx="1943769" cy="2114937"/>
+          </a:xfrm>
+          <a:prstGeom prst="rect">
+            <a:avLst/>
+          </a:prstGeom>
+          <a:noFill/>
+          <a:ln>
+            <a:solidFill>
+              <a:srgbClr val="FFFF00"/>
+            </a:solidFill>
+          </a:ln>
+        </p:spPr>
+        <p:style>
+          <a:lnRef idx="2">
+            <a:schemeClr val="accent1">
+              <a:shade val="50000"/>
+            </a:schemeClr>
+          </a:lnRef>
+          <a:fillRef idx="1">
+            <a:schemeClr val="accent1"/>
+          </a:fillRef>
+          <a:effectRef idx="0">
+            <a:schemeClr val="accent1"/>
+          </a:effectRef>
+          <a:fontRef idx="minor">
+            <a:schemeClr val="lt1"/>
+          </a:fontRef>
+        </p:style>
+        <p:txBody>
+          <a:bodyPr rtlCol="0" anchor="ctr"/>
+          <a:lstStyle/>
+          <a:p>
+            <a:pPr algn="ctr"/>
+            <a:endParaRPr kumimoji="1" lang="ja-JP" altLang="en-US"/>
+          </a:p>
+        </p:txBody>
+      </p:sp>
+      <p:sp>
+        <p:nvSpPr>
+          <p:cNvPr id="11" name="正方形/長方形 10"/>
+          <p:cNvSpPr/>
+          <p:nvPr/>
+        </p:nvSpPr>
+        <p:spPr>
+          <a:xfrm>
+            <a:off x="2766645" y="1946032"/>
+            <a:ext cx="1383323" cy="304800"/>
+          </a:xfrm>
+          <a:prstGeom prst="rect">
+            <a:avLst/>
+          </a:prstGeom>
+          <a:noFill/>
+          <a:ln>
+            <a:solidFill>
+              <a:schemeClr val="tx1">
+                <a:lumMod val="95000"/>
+              </a:schemeClr>
+            </a:solidFill>
+          </a:ln>
+        </p:spPr>
+        <p:style>
+          <a:lnRef idx="2">
+            <a:schemeClr val="accent1">
+              <a:shade val="50000"/>
+            </a:schemeClr>
+          </a:lnRef>
+          <a:fillRef idx="1">
+            <a:schemeClr val="accent1"/>
+          </a:fillRef>
+          <a:effectRef idx="0">
+            <a:schemeClr val="accent1"/>
+          </a:effectRef>
+          <a:fontRef idx="minor">
+            <a:schemeClr val="lt1"/>
+          </a:fontRef>
+        </p:style>
+        <p:txBody>
+          <a:bodyPr rtlCol="0" anchor="ctr"/>
+          <a:lstStyle/>
+          <a:p>
+            <a:pPr algn="ctr"/>
+            <a:endParaRPr kumimoji="1" lang="ja-JP" altLang="en-US"/>
+          </a:p>
+        </p:txBody>
+      </p:sp>
+      <p:cxnSp>
+        <p:nvCxnSpPr>
+          <p:cNvPr id="12" name="直線矢印コネクタ 11"/>
+          <p:cNvCxnSpPr>
+            <a:stCxn id="15" idx="3"/>
+            <a:endCxn id="11" idx="1"/>
+          </p:cNvCxnSpPr>
+          <p:nvPr/>
+        </p:nvCxnSpPr>
+        <p:spPr>
+          <a:xfrm flipV="1">
+            <a:off x="2086350" y="2098432"/>
+            <a:ext cx="680295" cy="2378354"/>
+          </a:xfrm>
+          <a:prstGeom prst="straightConnector1">
+            <a:avLst/>
+          </a:prstGeom>
+          <a:ln>
+            <a:tailEnd type="triangle"/>
+          </a:ln>
+        </p:spPr>
+        <p:style>
+          <a:lnRef idx="3">
+            <a:schemeClr val="accent3"/>
+          </a:lnRef>
+          <a:fillRef idx="0">
+            <a:schemeClr val="accent3"/>
+          </a:fillRef>
+          <a:effectRef idx="2">
+            <a:schemeClr val="accent3"/>
+          </a:effectRef>
+          <a:fontRef idx="minor">
+            <a:schemeClr val="tx1"/>
+          </a:fontRef>
+        </p:style>
+      </p:cxnSp>
+      <p:sp>
+        <p:nvSpPr>
+          <p:cNvPr id="14" name="テキスト ボックス 13"/>
+          <p:cNvSpPr txBox="1"/>
+          <p:nvPr/>
+        </p:nvSpPr>
+        <p:spPr>
+          <a:xfrm>
+            <a:off x="113722" y="3763905"/>
+            <a:ext cx="2262158" cy="1477328"/>
+          </a:xfrm>
+          <a:prstGeom prst="rect">
+            <a:avLst/>
+          </a:prstGeom>
+          <a:noFill/>
+        </p:spPr>
+        <p:txBody>
+          <a:bodyPr wrap="none" rtlCol="0">
+            <a:spAutoFit/>
+          </a:bodyPr>
+          <a:lstStyle/>
+          <a:p>
+            <a:r>
+              <a:rPr kumimoji="1" lang="ja-JP" altLang="en-US" dirty="0" smtClean="0">
+                <a:solidFill>
+                  <a:schemeClr val="accent2"/>
+                </a:solidFill>
+              </a:rPr>
+              <a:t>現在のスコア</a:t>
+            </a:r>
+            <a:endParaRPr kumimoji="1" lang="en-US" altLang="ja-JP" dirty="0" smtClean="0">
+              <a:solidFill>
+                <a:schemeClr val="accent2"/>
+              </a:solidFill>
+            </a:endParaRPr>
+          </a:p>
+          <a:p>
+            <a:r>
+              <a:rPr kumimoji="1" lang="ja-JP" altLang="en-US" dirty="0" smtClean="0"/>
+              <a:t>玉を打つと</a:t>
+            </a:r>
+            <a:r>
+              <a:rPr kumimoji="1" lang="en-US" altLang="ja-JP" dirty="0" smtClean="0"/>
+              <a:t>-</a:t>
+            </a:r>
+            <a:r>
+              <a:rPr kumimoji="1" lang="ja-JP" altLang="en-US" dirty="0" smtClean="0"/>
+              <a:t>１０</a:t>
+            </a:r>
+            <a:endParaRPr kumimoji="1" lang="en-US" altLang="ja-JP" dirty="0" smtClean="0"/>
+          </a:p>
+          <a:p>
+            <a:r>
+              <a:rPr lang="ja-JP" altLang="en-US" dirty="0"/>
+              <a:t>玉</a:t>
+            </a:r>
+            <a:r>
+              <a:rPr lang="ja-JP" altLang="en-US" dirty="0" smtClean="0"/>
+              <a:t>が敵に当たると、</a:t>
+            </a:r>
+            <a:endParaRPr lang="en-US" altLang="ja-JP" dirty="0" smtClean="0"/>
+          </a:p>
+          <a:p>
+            <a:r>
+              <a:rPr kumimoji="1" lang="en-US" altLang="ja-JP" dirty="0" smtClean="0"/>
+              <a:t>+</a:t>
+            </a:r>
+            <a:r>
+              <a:rPr kumimoji="1" lang="ja-JP" altLang="en-US" dirty="0" smtClean="0"/>
+              <a:t>１００加算</a:t>
+            </a:r>
+            <a:endParaRPr kumimoji="1" lang="en-US" altLang="ja-JP" dirty="0" smtClean="0"/>
+          </a:p>
+          <a:p>
+            <a:r>
+              <a:rPr lang="ja-JP" altLang="en-US" dirty="0" smtClean="0"/>
+              <a:t>されます</a:t>
+            </a:r>
+            <a:endParaRPr kumimoji="1" lang="ja-JP" altLang="en-US" dirty="0"/>
+          </a:p>
+        </p:txBody>
+      </p:sp>
+      <p:sp>
+        <p:nvSpPr>
+          <p:cNvPr id="15" name="正方形/長方形 14"/>
+          <p:cNvSpPr/>
+          <p:nvPr/>
+        </p:nvSpPr>
+        <p:spPr>
+          <a:xfrm>
+            <a:off x="148442" y="3712339"/>
+            <a:ext cx="1937908" cy="1528893"/>
+          </a:xfrm>
+          <a:prstGeom prst="rect">
+            <a:avLst/>
+          </a:prstGeom>
+          <a:noFill/>
+          <a:ln>
+            <a:solidFill>
+              <a:srgbClr val="FFFF00"/>
+            </a:solidFill>
+          </a:ln>
+        </p:spPr>
+        <p:style>
+          <a:lnRef idx="2">
+            <a:schemeClr val="accent1">
+              <a:shade val="50000"/>
+            </a:schemeClr>
+          </a:lnRef>
+          <a:fillRef idx="1">
+            <a:schemeClr val="accent1"/>
+          </a:fillRef>
+          <a:effectRef idx="0">
+            <a:schemeClr val="accent1"/>
+          </a:effectRef>
+          <a:fontRef idx="minor">
+            <a:schemeClr val="lt1"/>
+          </a:fontRef>
+        </p:style>
+        <p:txBody>
+          <a:bodyPr rtlCol="0" anchor="ctr"/>
+          <a:lstStyle/>
+          <a:p>
+            <a:pPr algn="ctr"/>
+            <a:endParaRPr kumimoji="1" lang="ja-JP" altLang="en-US"/>
+          </a:p>
+        </p:txBody>
+      </p:sp>
+      <p:sp>
+        <p:nvSpPr>
+          <p:cNvPr id="17" name="正方形/長方形 16"/>
+          <p:cNvSpPr/>
+          <p:nvPr/>
+        </p:nvSpPr>
+        <p:spPr>
+          <a:xfrm>
+            <a:off x="5076092" y="1434585"/>
+            <a:ext cx="527539" cy="304800"/>
+          </a:xfrm>
+          <a:prstGeom prst="rect">
+            <a:avLst/>
+          </a:prstGeom>
+          <a:noFill/>
+          <a:ln>
+            <a:solidFill>
+              <a:schemeClr val="tx1">
+                <a:lumMod val="95000"/>
+              </a:schemeClr>
+            </a:solidFill>
+          </a:ln>
+        </p:spPr>
+        <p:style>
+          <a:lnRef idx="2">
+            <a:schemeClr val="accent1">
+              <a:shade val="50000"/>
+            </a:schemeClr>
+          </a:lnRef>
+          <a:fillRef idx="1">
+            <a:schemeClr val="accent1"/>
+          </a:fillRef>
+          <a:effectRef idx="0">
+            <a:schemeClr val="accent1"/>
+          </a:effectRef>
+          <a:fontRef idx="minor">
+            <a:schemeClr val="lt1"/>
+          </a:fontRef>
+        </p:style>
+        <p:txBody>
+          <a:bodyPr rtlCol="0" anchor="ctr"/>
+          <a:lstStyle/>
+          <a:p>
+            <a:pPr algn="ctr"/>
+            <a:endParaRPr kumimoji="1" lang="ja-JP" altLang="en-US"/>
+          </a:p>
+        </p:txBody>
+      </p:sp>
+      <p:cxnSp>
+        <p:nvCxnSpPr>
+          <p:cNvPr id="18" name="直線矢印コネクタ 17"/>
+          <p:cNvCxnSpPr/>
+          <p:nvPr/>
+        </p:nvCxnSpPr>
+        <p:spPr>
+          <a:xfrm flipH="1">
+            <a:off x="5339861" y="1042169"/>
+            <a:ext cx="1096108" cy="318978"/>
+          </a:xfrm>
+          <a:prstGeom prst="straightConnector1">
+            <a:avLst/>
+          </a:prstGeom>
+          <a:ln>
+            <a:tailEnd type="triangle"/>
+          </a:ln>
+        </p:spPr>
+        <p:style>
+          <a:lnRef idx="3">
+            <a:schemeClr val="accent3"/>
+          </a:lnRef>
+          <a:fillRef idx="0">
+            <a:schemeClr val="accent3"/>
+          </a:fillRef>
+          <a:effectRef idx="2">
+            <a:schemeClr val="accent3"/>
+          </a:effectRef>
+          <a:fontRef idx="minor">
+            <a:schemeClr val="tx1"/>
+          </a:fontRef>
+        </p:style>
+      </p:cxnSp>
+      <p:sp>
+        <p:nvSpPr>
+          <p:cNvPr id="20" name="テキスト ボックス 19"/>
+          <p:cNvSpPr txBox="1"/>
+          <p:nvPr/>
+        </p:nvSpPr>
+        <p:spPr>
+          <a:xfrm>
+            <a:off x="6449674" y="118839"/>
+            <a:ext cx="4339650" cy="923330"/>
+          </a:xfrm>
+          <a:prstGeom prst="rect">
+            <a:avLst/>
+          </a:prstGeom>
+          <a:noFill/>
+        </p:spPr>
+        <p:txBody>
+          <a:bodyPr wrap="none" rtlCol="0">
+            <a:spAutoFit/>
+          </a:bodyPr>
+          <a:lstStyle/>
+          <a:p>
+            <a:r>
+              <a:rPr kumimoji="1" lang="ja-JP" altLang="en-US" dirty="0" smtClean="0">
+                <a:solidFill>
+                  <a:schemeClr val="accent2"/>
+                </a:solidFill>
+              </a:rPr>
+              <a:t>残り時間</a:t>
+            </a:r>
+            <a:endParaRPr kumimoji="1" lang="en-US" altLang="ja-JP" dirty="0" smtClean="0">
+              <a:solidFill>
+                <a:schemeClr val="accent2"/>
+              </a:solidFill>
+            </a:endParaRPr>
+          </a:p>
+          <a:p>
+            <a:r>
+              <a:rPr lang="en-US" altLang="ja-JP" dirty="0" smtClean="0"/>
+              <a:t>0</a:t>
+            </a:r>
+            <a:r>
+              <a:rPr lang="ja-JP" altLang="en-US" dirty="0" smtClean="0"/>
+              <a:t>になるまで生き残っていたら</a:t>
+            </a:r>
+            <a:endParaRPr lang="en-US" altLang="ja-JP" dirty="0" smtClean="0"/>
+          </a:p>
+          <a:p>
+            <a:r>
+              <a:rPr kumimoji="1" lang="ja-JP" altLang="en-US" dirty="0" smtClean="0"/>
+              <a:t>ゲームクリア</a:t>
+            </a:r>
+            <a:r>
+              <a:rPr lang="ja-JP" altLang="en-US" dirty="0" smtClean="0"/>
+              <a:t>です</a:t>
+            </a:r>
+            <a:r>
+              <a:rPr kumimoji="1" lang="ja-JP" altLang="en-US" dirty="0" smtClean="0"/>
+              <a:t>　　　　　　　　　　</a:t>
+            </a:r>
+            <a:endParaRPr kumimoji="1" lang="ja-JP" altLang="en-US" dirty="0"/>
+          </a:p>
+        </p:txBody>
+      </p:sp>
+      <p:sp>
+        <p:nvSpPr>
+          <p:cNvPr id="21" name="正方形/長方形 20"/>
+          <p:cNvSpPr/>
+          <p:nvPr/>
+        </p:nvSpPr>
+        <p:spPr>
+          <a:xfrm>
+            <a:off x="6455945" y="118838"/>
+            <a:ext cx="3203870" cy="1018299"/>
+          </a:xfrm>
+          <a:prstGeom prst="rect">
+            <a:avLst/>
+          </a:prstGeom>
+          <a:noFill/>
+          <a:ln>
+            <a:solidFill>
+              <a:srgbClr val="FFFF00"/>
+            </a:solidFill>
+          </a:ln>
+        </p:spPr>
+        <p:style>
+          <a:lnRef idx="2">
+            <a:schemeClr val="accent1">
+              <a:shade val="50000"/>
+            </a:schemeClr>
+          </a:lnRef>
+          <a:fillRef idx="1">
+            <a:schemeClr val="accent1"/>
+          </a:fillRef>
+          <a:effectRef idx="0">
+            <a:schemeClr val="accent1"/>
+          </a:effectRef>
+          <a:fontRef idx="minor">
+            <a:schemeClr val="lt1"/>
+          </a:fontRef>
+        </p:style>
+        <p:txBody>
+          <a:bodyPr rtlCol="0" anchor="ctr"/>
+          <a:lstStyle/>
+          <a:p>
+            <a:pPr algn="ctr"/>
+            <a:endParaRPr kumimoji="1" lang="ja-JP" altLang="en-US"/>
+          </a:p>
+        </p:txBody>
+      </p:sp>
+      <p:sp>
+        <p:nvSpPr>
+          <p:cNvPr id="22" name="正方形/長方形 21"/>
+          <p:cNvSpPr/>
+          <p:nvPr/>
+        </p:nvSpPr>
+        <p:spPr>
+          <a:xfrm>
+            <a:off x="5076092" y="2706470"/>
+            <a:ext cx="1113693" cy="1361438"/>
+          </a:xfrm>
+          <a:prstGeom prst="rect">
+            <a:avLst/>
+          </a:prstGeom>
+          <a:noFill/>
+          <a:ln>
+            <a:solidFill>
+              <a:schemeClr val="tx1">
+                <a:lumMod val="95000"/>
+              </a:schemeClr>
+            </a:solidFill>
+          </a:ln>
+        </p:spPr>
+        <p:style>
+          <a:lnRef idx="2">
+            <a:schemeClr val="accent1">
+              <a:shade val="50000"/>
+            </a:schemeClr>
+          </a:lnRef>
+          <a:fillRef idx="1">
+            <a:schemeClr val="accent1"/>
+          </a:fillRef>
+          <a:effectRef idx="0">
+            <a:schemeClr val="accent1"/>
+          </a:effectRef>
+          <a:fontRef idx="minor">
+            <a:schemeClr val="lt1"/>
+          </a:fontRef>
+        </p:style>
+        <p:txBody>
+          <a:bodyPr rtlCol="0" anchor="ctr"/>
+          <a:lstStyle/>
+          <a:p>
+            <a:pPr algn="ctr"/>
+            <a:endParaRPr kumimoji="1" lang="ja-JP" altLang="en-US"/>
+          </a:p>
+        </p:txBody>
+      </p:sp>
+      <p:cxnSp>
+        <p:nvCxnSpPr>
+          <p:cNvPr id="29" name="直線矢印コネクタ 28"/>
+          <p:cNvCxnSpPr/>
+          <p:nvPr/>
+        </p:nvCxnSpPr>
+        <p:spPr>
+          <a:xfrm flipH="1" flipV="1">
+            <a:off x="6189786" y="3732371"/>
+            <a:ext cx="2429713" cy="1761718"/>
+          </a:xfrm>
+          <a:prstGeom prst="straightConnector1">
+            <a:avLst/>
+          </a:prstGeom>
+          <a:ln>
+            <a:tailEnd type="triangle"/>
+          </a:ln>
+        </p:spPr>
+        <p:style>
+          <a:lnRef idx="3">
+            <a:schemeClr val="accent3"/>
+          </a:lnRef>
+          <a:fillRef idx="0">
+            <a:schemeClr val="accent3"/>
+          </a:fillRef>
+          <a:effectRef idx="2">
+            <a:schemeClr val="accent3"/>
+          </a:effectRef>
+          <a:fontRef idx="minor">
+            <a:schemeClr val="tx1"/>
+          </a:fontRef>
+        </p:style>
+      </p:cxnSp>
+      <p:sp>
+        <p:nvSpPr>
+          <p:cNvPr id="32" name="テキスト ボックス 31"/>
+          <p:cNvSpPr txBox="1"/>
+          <p:nvPr/>
+        </p:nvSpPr>
+        <p:spPr>
+          <a:xfrm>
+            <a:off x="8619499" y="5427001"/>
+            <a:ext cx="2492990" cy="369332"/>
+          </a:xfrm>
+          <a:prstGeom prst="rect">
+            <a:avLst/>
+          </a:prstGeom>
+          <a:noFill/>
+        </p:spPr>
+        <p:txBody>
+          <a:bodyPr wrap="none" rtlCol="0">
+            <a:spAutoFit/>
+          </a:bodyPr>
+          <a:lstStyle/>
+          <a:p>
+            <a:r>
+              <a:rPr kumimoji="1" lang="ja-JP" altLang="en-US" dirty="0" smtClean="0">
+                <a:solidFill>
+                  <a:schemeClr val="accent2"/>
+                </a:solidFill>
+              </a:rPr>
+              <a:t>操作するキャラクター</a:t>
+            </a:r>
+            <a:endParaRPr kumimoji="1" lang="ja-JP" altLang="en-US" dirty="0">
+              <a:solidFill>
+                <a:schemeClr val="accent2"/>
+              </a:solidFill>
+            </a:endParaRPr>
+          </a:p>
+        </p:txBody>
+      </p:sp>
+      <p:sp>
+        <p:nvSpPr>
+          <p:cNvPr id="33" name="正方形/長方形 32"/>
+          <p:cNvSpPr/>
+          <p:nvPr/>
+        </p:nvSpPr>
+        <p:spPr>
+          <a:xfrm>
+            <a:off x="8619088" y="5427002"/>
+            <a:ext cx="2493401" cy="369332"/>
+          </a:xfrm>
+          <a:prstGeom prst="rect">
+            <a:avLst/>
+          </a:prstGeom>
+          <a:noFill/>
+          <a:ln>
+            <a:solidFill>
+              <a:srgbClr val="FFFF00"/>
+            </a:solidFill>
+          </a:ln>
+        </p:spPr>
+        <p:style>
+          <a:lnRef idx="2">
+            <a:schemeClr val="accent1">
+              <a:shade val="50000"/>
+            </a:schemeClr>
+          </a:lnRef>
+          <a:fillRef idx="1">
+            <a:schemeClr val="accent1"/>
+          </a:fillRef>
+          <a:effectRef idx="0">
+            <a:schemeClr val="accent1"/>
+          </a:effectRef>
+          <a:fontRef idx="minor">
+            <a:schemeClr val="lt1"/>
+          </a:fontRef>
+        </p:style>
+        <p:txBody>
+          <a:bodyPr rtlCol="0" anchor="ctr"/>
+          <a:lstStyle/>
+          <a:p>
+            <a:pPr algn="ctr"/>
+            <a:endParaRPr kumimoji="1" lang="ja-JP" altLang="en-US"/>
+          </a:p>
+        </p:txBody>
+      </p:sp>
     </p:spTree>
     <p:extLst>
       <p:ext uri="{BB962C8B-B14F-4D97-AF65-F5344CB8AC3E}">
@@ -7436,52 +8264,14 @@
       </p:grpSpPr>
       <p:sp>
         <p:nvSpPr>
-          <p:cNvPr id="4" name="テキスト ボックス 3"/>
-          <p:cNvSpPr txBox="1"/>
-          <p:nvPr/>
-        </p:nvSpPr>
-        <p:spPr>
-          <a:xfrm>
-            <a:off x="374904" y="347472"/>
-            <a:ext cx="3429000" cy="707886"/>
-          </a:xfrm>
-          <a:prstGeom prst="rect">
-            <a:avLst/>
-          </a:prstGeom>
-          <a:noFill/>
-        </p:spPr>
-        <p:txBody>
-          <a:bodyPr wrap="square" rtlCol="0">
-            <a:spAutoFit/>
-          </a:bodyPr>
-          <a:lstStyle/>
-          <a:p>
-            <a:r>
-              <a:rPr lang="ja-JP" altLang="en-US" sz="4000" dirty="0" smtClean="0">
-                <a:solidFill>
-                  <a:srgbClr val="FF0000"/>
-                </a:solidFill>
-              </a:rPr>
-              <a:t>遊び方・説明</a:t>
-            </a:r>
-            <a:endParaRPr kumimoji="1" lang="ja-JP" altLang="en-US" sz="4000" dirty="0">
-              <a:solidFill>
-                <a:srgbClr val="FF0000"/>
-              </a:solidFill>
-            </a:endParaRPr>
-          </a:p>
-        </p:txBody>
-      </p:sp>
-      <p:sp>
-        <p:nvSpPr>
-          <p:cNvPr id="5" name="正方形/長方形 4"/>
+          <p:cNvPr id="32" name="正方形/長方形 31"/>
           <p:cNvSpPr/>
           <p:nvPr/>
         </p:nvSpPr>
         <p:spPr>
           <a:xfrm>
-            <a:off x="402336" y="338328"/>
-            <a:ext cx="3145536" cy="722376"/>
+            <a:off x="418565" y="1869210"/>
+            <a:ext cx="7350604" cy="4695713"/>
           </a:xfrm>
           <a:prstGeom prst="rect">
             <a:avLst/>
@@ -7489,7 +8279,9 @@
           <a:noFill/>
           <a:ln>
             <a:solidFill>
-              <a:schemeClr val="tx1"/>
+              <a:schemeClr val="tx1">
+                <a:alpha val="95000"/>
+              </a:schemeClr>
             </a:solidFill>
           </a:ln>
         </p:spPr>
@@ -7518,6 +8310,1412 @@
           </a:p>
         </p:txBody>
       </p:sp>
+      <p:sp>
+        <p:nvSpPr>
+          <p:cNvPr id="4" name="テキスト ボックス 3"/>
+          <p:cNvSpPr txBox="1"/>
+          <p:nvPr/>
+        </p:nvSpPr>
+        <p:spPr>
+          <a:xfrm>
+            <a:off x="374904" y="347472"/>
+            <a:ext cx="3429000" cy="707886"/>
+          </a:xfrm>
+          <a:prstGeom prst="rect">
+            <a:avLst/>
+          </a:prstGeom>
+          <a:noFill/>
+        </p:spPr>
+        <p:txBody>
+          <a:bodyPr wrap="square" rtlCol="0">
+            <a:spAutoFit/>
+          </a:bodyPr>
+          <a:lstStyle/>
+          <a:p>
+            <a:r>
+              <a:rPr lang="ja-JP" altLang="en-US" sz="4000" dirty="0" smtClean="0">
+                <a:solidFill>
+                  <a:srgbClr val="FF0000"/>
+                </a:solidFill>
+              </a:rPr>
+              <a:t>遊び方・説明</a:t>
+            </a:r>
+            <a:endParaRPr kumimoji="1" lang="ja-JP" altLang="en-US" sz="4000" dirty="0">
+              <a:solidFill>
+                <a:srgbClr val="FF0000"/>
+              </a:solidFill>
+            </a:endParaRPr>
+          </a:p>
+        </p:txBody>
+      </p:sp>
+      <p:sp>
+        <p:nvSpPr>
+          <p:cNvPr id="5" name="正方形/長方形 4"/>
+          <p:cNvSpPr/>
+          <p:nvPr/>
+        </p:nvSpPr>
+        <p:spPr>
+          <a:xfrm>
+            <a:off x="402336" y="338328"/>
+            <a:ext cx="3145536" cy="722376"/>
+          </a:xfrm>
+          <a:prstGeom prst="rect">
+            <a:avLst/>
+          </a:prstGeom>
+          <a:noFill/>
+          <a:ln>
+            <a:solidFill>
+              <a:schemeClr val="tx1"/>
+            </a:solidFill>
+          </a:ln>
+        </p:spPr>
+        <p:style>
+          <a:lnRef idx="2">
+            <a:schemeClr val="accent1">
+              <a:shade val="50000"/>
+            </a:schemeClr>
+          </a:lnRef>
+          <a:fillRef idx="1">
+            <a:schemeClr val="accent1"/>
+          </a:fillRef>
+          <a:effectRef idx="0">
+            <a:schemeClr val="accent1"/>
+          </a:effectRef>
+          <a:fontRef idx="minor">
+            <a:schemeClr val="lt1"/>
+          </a:fontRef>
+        </p:style>
+        <p:txBody>
+          <a:bodyPr rtlCol="0" anchor="ctr"/>
+          <a:lstStyle/>
+          <a:p>
+            <a:pPr algn="ctr"/>
+            <a:endParaRPr kumimoji="1" lang="ja-JP" altLang="en-US"/>
+          </a:p>
+        </p:txBody>
+      </p:sp>
+      <p:pic>
+        <p:nvPicPr>
+          <p:cNvPr id="1026" name="Picture 2" descr="上から見たマウスのイラスト | かわいいフリー素材集 いらすとや"/>
+          <p:cNvPicPr>
+            <a:picLocks noChangeAspect="1" noChangeArrowheads="1"/>
+          </p:cNvPicPr>
+          <p:nvPr/>
+        </p:nvPicPr>
+        <p:blipFill>
+          <a:blip r:embed="rId2" cstate="print">
+            <a:extLst>
+              <a:ext uri="{28A0092B-C50C-407E-A947-70E740481C1C}">
+                <a14:useLocalDpi xmlns:a14="http://schemas.microsoft.com/office/drawing/2010/main" val="0"/>
+              </a:ext>
+            </a:extLst>
+          </a:blip>
+          <a:srcRect/>
+          <a:stretch>
+            <a:fillRect/>
+          </a:stretch>
+        </p:blipFill>
+        <p:spPr bwMode="auto">
+          <a:xfrm>
+            <a:off x="3736348" y="3059832"/>
+            <a:ext cx="2140857" cy="2963960"/>
+          </a:xfrm>
+          <a:prstGeom prst="rect">
+            <a:avLst/>
+          </a:prstGeom>
+          <a:noFill/>
+          <a:extLst>
+            <a:ext uri="{909E8E84-426E-40DD-AFC4-6F175D3DCCD1}">
+              <a14:hiddenFill xmlns:a14="http://schemas.microsoft.com/office/drawing/2010/main">
+                <a:solidFill>
+                  <a:srgbClr val="FFFFFF"/>
+                </a:solidFill>
+              </a14:hiddenFill>
+            </a:ext>
+          </a:extLst>
+        </p:spPr>
+      </p:pic>
+      <p:pic>
+        <p:nvPicPr>
+          <p:cNvPr id="1028" name="Picture 4" descr="キーボードのイラスト 1"/>
+          <p:cNvPicPr>
+            <a:picLocks noChangeAspect="1" noChangeArrowheads="1"/>
+          </p:cNvPicPr>
+          <p:nvPr/>
+        </p:nvPicPr>
+        <p:blipFill>
+          <a:blip r:embed="rId3" cstate="print">
+            <a:extLst>
+              <a:ext uri="{28A0092B-C50C-407E-A947-70E740481C1C}">
+                <a14:useLocalDpi xmlns:a14="http://schemas.microsoft.com/office/drawing/2010/main" val="0"/>
+              </a:ext>
+            </a:extLst>
+          </a:blip>
+          <a:srcRect/>
+          <a:stretch>
+            <a:fillRect/>
+          </a:stretch>
+        </p:blipFill>
+        <p:spPr bwMode="auto">
+          <a:xfrm>
+            <a:off x="613352" y="2445605"/>
+            <a:ext cx="3313879" cy="1579073"/>
+          </a:xfrm>
+          <a:prstGeom prst="rect">
+            <a:avLst/>
+          </a:prstGeom>
+          <a:noFill/>
+          <a:extLst>
+            <a:ext uri="{909E8E84-426E-40DD-AFC4-6F175D3DCCD1}">
+              <a14:hiddenFill xmlns:a14="http://schemas.microsoft.com/office/drawing/2010/main">
+                <a:solidFill>
+                  <a:srgbClr val="FFFFFF"/>
+                </a:solidFill>
+              </a14:hiddenFill>
+            </a:ext>
+          </a:extLst>
+        </p:spPr>
+      </p:pic>
+      <p:sp>
+        <p:nvSpPr>
+          <p:cNvPr id="2" name="テキスト ボックス 1"/>
+          <p:cNvSpPr txBox="1"/>
+          <p:nvPr/>
+        </p:nvSpPr>
+        <p:spPr>
+          <a:xfrm>
+            <a:off x="1370044" y="4418665"/>
+            <a:ext cx="2723823" cy="369332"/>
+          </a:xfrm>
+          <a:prstGeom prst="rect">
+            <a:avLst/>
+          </a:prstGeom>
+          <a:noFill/>
+        </p:spPr>
+        <p:txBody>
+          <a:bodyPr wrap="none" rtlCol="0">
+            <a:spAutoFit/>
+          </a:bodyPr>
+          <a:lstStyle/>
+          <a:p>
+            <a:r>
+              <a:rPr kumimoji="1" lang="ja-JP" altLang="en-US" dirty="0" smtClean="0"/>
+              <a:t>スペースキーで</a:t>
+            </a:r>
+            <a:r>
+              <a:rPr lang="ja-JP" altLang="en-US" dirty="0" smtClean="0"/>
+              <a:t>ジャンプ</a:t>
+            </a:r>
+            <a:endParaRPr kumimoji="1" lang="ja-JP" altLang="en-US" dirty="0"/>
+          </a:p>
+        </p:txBody>
+      </p:sp>
+      <p:sp>
+        <p:nvSpPr>
+          <p:cNvPr id="3" name="テキスト ボックス 2"/>
+          <p:cNvSpPr txBox="1"/>
+          <p:nvPr/>
+        </p:nvSpPr>
+        <p:spPr>
+          <a:xfrm>
+            <a:off x="613352" y="2005451"/>
+            <a:ext cx="3155031" cy="369332"/>
+          </a:xfrm>
+          <a:prstGeom prst="rect">
+            <a:avLst/>
+          </a:prstGeom>
+          <a:noFill/>
+        </p:spPr>
+        <p:txBody>
+          <a:bodyPr wrap="none" rtlCol="0">
+            <a:spAutoFit/>
+          </a:bodyPr>
+          <a:lstStyle/>
+          <a:p>
+            <a:r>
+              <a:rPr kumimoji="1" lang="en-US" altLang="ja-JP" dirty="0" smtClean="0"/>
+              <a:t>Q</a:t>
+            </a:r>
+            <a:r>
+              <a:rPr kumimoji="1" lang="ja-JP" altLang="en-US" dirty="0" smtClean="0"/>
+              <a:t>キーで攻撃・移動切り替え</a:t>
+            </a:r>
+            <a:endParaRPr kumimoji="1" lang="ja-JP" altLang="en-US" dirty="0"/>
+          </a:p>
+        </p:txBody>
+      </p:sp>
+      <p:sp>
+        <p:nvSpPr>
+          <p:cNvPr id="6" name="テキスト ボックス 5"/>
+          <p:cNvSpPr txBox="1"/>
+          <p:nvPr/>
+        </p:nvSpPr>
+        <p:spPr>
+          <a:xfrm>
+            <a:off x="3940828" y="2239999"/>
+            <a:ext cx="3877985" cy="646331"/>
+          </a:xfrm>
+          <a:prstGeom prst="rect">
+            <a:avLst/>
+          </a:prstGeom>
+          <a:noFill/>
+        </p:spPr>
+        <p:txBody>
+          <a:bodyPr wrap="none" rtlCol="0">
+            <a:spAutoFit/>
+          </a:bodyPr>
+          <a:lstStyle/>
+          <a:p>
+            <a:r>
+              <a:rPr kumimoji="1" lang="ja-JP" altLang="en-US" dirty="0" smtClean="0"/>
+              <a:t>マウスの右クリックを押したまま、</a:t>
+            </a:r>
+            <a:endParaRPr kumimoji="1" lang="en-US" altLang="ja-JP" dirty="0" smtClean="0"/>
+          </a:p>
+          <a:p>
+            <a:r>
+              <a:rPr kumimoji="1" lang="ja-JP" altLang="en-US" dirty="0" smtClean="0"/>
+              <a:t>マウスの移動で</a:t>
+            </a:r>
+            <a:r>
+              <a:rPr lang="ja-JP" altLang="en-US" dirty="0" smtClean="0"/>
+              <a:t>視点移動</a:t>
+            </a:r>
+            <a:endParaRPr kumimoji="1" lang="ja-JP" altLang="en-US" dirty="0"/>
+          </a:p>
+        </p:txBody>
+      </p:sp>
+      <p:sp>
+        <p:nvSpPr>
+          <p:cNvPr id="7" name="テキスト ボックス 6"/>
+          <p:cNvSpPr txBox="1"/>
+          <p:nvPr/>
+        </p:nvSpPr>
+        <p:spPr>
+          <a:xfrm>
+            <a:off x="8572168" y="4931425"/>
+            <a:ext cx="2031325" cy="369332"/>
+          </a:xfrm>
+          <a:prstGeom prst="rect">
+            <a:avLst/>
+          </a:prstGeom>
+          <a:noFill/>
+        </p:spPr>
+        <p:txBody>
+          <a:bodyPr wrap="none" rtlCol="0">
+            <a:spAutoFit/>
+          </a:bodyPr>
+          <a:lstStyle/>
+          <a:p>
+            <a:r>
+              <a:rPr kumimoji="1" lang="ja-JP" altLang="en-US" dirty="0" smtClean="0"/>
+              <a:t>左クリックで</a:t>
+            </a:r>
+            <a:r>
+              <a:rPr lang="ja-JP" altLang="en-US" dirty="0"/>
+              <a:t>攻撃</a:t>
+            </a:r>
+            <a:endParaRPr kumimoji="1" lang="ja-JP" altLang="en-US" dirty="0"/>
+          </a:p>
+        </p:txBody>
+      </p:sp>
+      <p:sp>
+        <p:nvSpPr>
+          <p:cNvPr id="8" name="テキスト ボックス 7"/>
+          <p:cNvSpPr txBox="1"/>
+          <p:nvPr/>
+        </p:nvSpPr>
+        <p:spPr>
+          <a:xfrm>
+            <a:off x="7830569" y="2193832"/>
+            <a:ext cx="3877985" cy="369332"/>
+          </a:xfrm>
+          <a:prstGeom prst="rect">
+            <a:avLst/>
+          </a:prstGeom>
+          <a:noFill/>
+        </p:spPr>
+        <p:txBody>
+          <a:bodyPr wrap="none" rtlCol="0">
+            <a:spAutoFit/>
+          </a:bodyPr>
+          <a:lstStyle/>
+          <a:p>
+            <a:r>
+              <a:rPr kumimoji="1" lang="ja-JP" altLang="en-US" dirty="0" smtClean="0"/>
+              <a:t>左</a:t>
+            </a:r>
+            <a:r>
+              <a:rPr lang="ja-JP" altLang="en-US" dirty="0" smtClean="0"/>
+              <a:t>クリックでカーソルの位置に移動</a:t>
+            </a:r>
+            <a:endParaRPr kumimoji="1" lang="ja-JP" altLang="en-US" dirty="0"/>
+          </a:p>
+        </p:txBody>
+      </p:sp>
+      <p:sp>
+        <p:nvSpPr>
+          <p:cNvPr id="10" name="正方形/長方形 9"/>
+          <p:cNvSpPr/>
+          <p:nvPr/>
+        </p:nvSpPr>
+        <p:spPr>
+          <a:xfrm>
+            <a:off x="613352" y="2005451"/>
+            <a:ext cx="3155031" cy="362529"/>
+          </a:xfrm>
+          <a:prstGeom prst="rect">
+            <a:avLst/>
+          </a:prstGeom>
+          <a:noFill/>
+          <a:ln>
+            <a:solidFill>
+              <a:schemeClr val="accent3"/>
+            </a:solidFill>
+          </a:ln>
+        </p:spPr>
+        <p:style>
+          <a:lnRef idx="2">
+            <a:schemeClr val="accent3">
+              <a:shade val="50000"/>
+            </a:schemeClr>
+          </a:lnRef>
+          <a:fillRef idx="1">
+            <a:schemeClr val="accent3"/>
+          </a:fillRef>
+          <a:effectRef idx="0">
+            <a:schemeClr val="accent3"/>
+          </a:effectRef>
+          <a:fontRef idx="minor">
+            <a:schemeClr val="lt1"/>
+          </a:fontRef>
+        </p:style>
+        <p:txBody>
+          <a:bodyPr rtlCol="0" anchor="ctr"/>
+          <a:lstStyle/>
+          <a:p>
+            <a:pPr algn="ctr"/>
+            <a:endParaRPr kumimoji="1" lang="ja-JP" altLang="en-US"/>
+          </a:p>
+        </p:txBody>
+      </p:sp>
+      <p:sp>
+        <p:nvSpPr>
+          <p:cNvPr id="12" name="正方形/長方形 11"/>
+          <p:cNvSpPr/>
+          <p:nvPr/>
+        </p:nvSpPr>
+        <p:spPr>
+          <a:xfrm>
+            <a:off x="978291" y="2879376"/>
+            <a:ext cx="217464" cy="227239"/>
+          </a:xfrm>
+          <a:prstGeom prst="rect">
+            <a:avLst/>
+          </a:prstGeom>
+          <a:noFill/>
+          <a:ln>
+            <a:solidFill>
+              <a:schemeClr val="accent3"/>
+            </a:solidFill>
+          </a:ln>
+        </p:spPr>
+        <p:style>
+          <a:lnRef idx="2">
+            <a:schemeClr val="accent1">
+              <a:shade val="50000"/>
+            </a:schemeClr>
+          </a:lnRef>
+          <a:fillRef idx="1">
+            <a:schemeClr val="accent1"/>
+          </a:fillRef>
+          <a:effectRef idx="0">
+            <a:schemeClr val="accent1"/>
+          </a:effectRef>
+          <a:fontRef idx="minor">
+            <a:schemeClr val="lt1"/>
+          </a:fontRef>
+        </p:style>
+        <p:txBody>
+          <a:bodyPr rtlCol="0" anchor="ctr"/>
+          <a:lstStyle/>
+          <a:p>
+            <a:pPr algn="ctr"/>
+            <a:endParaRPr kumimoji="1" lang="ja-JP" altLang="en-US"/>
+          </a:p>
+        </p:txBody>
+      </p:sp>
+      <p:cxnSp>
+        <p:nvCxnSpPr>
+          <p:cNvPr id="14" name="直線矢印コネクタ 13"/>
+          <p:cNvCxnSpPr>
+            <a:stCxn id="10" idx="2"/>
+          </p:cNvCxnSpPr>
+          <p:nvPr/>
+        </p:nvCxnSpPr>
+        <p:spPr>
+          <a:xfrm flipH="1">
+            <a:off x="1242646" y="2367980"/>
+            <a:ext cx="948222" cy="511396"/>
+          </a:xfrm>
+          <a:prstGeom prst="straightConnector1">
+            <a:avLst/>
+          </a:prstGeom>
+          <a:ln>
+            <a:tailEnd type="triangle"/>
+          </a:ln>
+        </p:spPr>
+        <p:style>
+          <a:lnRef idx="1">
+            <a:schemeClr val="accent3"/>
+          </a:lnRef>
+          <a:fillRef idx="0">
+            <a:schemeClr val="accent3"/>
+          </a:fillRef>
+          <a:effectRef idx="0">
+            <a:schemeClr val="accent3"/>
+          </a:effectRef>
+          <a:fontRef idx="minor">
+            <a:schemeClr val="tx1"/>
+          </a:fontRef>
+        </p:style>
+      </p:cxnSp>
+      <p:sp>
+        <p:nvSpPr>
+          <p:cNvPr id="17" name="正方形/長方形 16"/>
+          <p:cNvSpPr/>
+          <p:nvPr/>
+        </p:nvSpPr>
+        <p:spPr>
+          <a:xfrm>
+            <a:off x="1290378" y="4407924"/>
+            <a:ext cx="2679869" cy="380073"/>
+          </a:xfrm>
+          <a:prstGeom prst="rect">
+            <a:avLst/>
+          </a:prstGeom>
+          <a:noFill/>
+          <a:ln>
+            <a:solidFill>
+              <a:schemeClr val="accent3"/>
+            </a:solidFill>
+          </a:ln>
+        </p:spPr>
+        <p:style>
+          <a:lnRef idx="2">
+            <a:schemeClr val="accent3">
+              <a:shade val="50000"/>
+            </a:schemeClr>
+          </a:lnRef>
+          <a:fillRef idx="1">
+            <a:schemeClr val="accent3"/>
+          </a:fillRef>
+          <a:effectRef idx="0">
+            <a:schemeClr val="accent3"/>
+          </a:effectRef>
+          <a:fontRef idx="minor">
+            <a:schemeClr val="lt1"/>
+          </a:fontRef>
+        </p:style>
+        <p:txBody>
+          <a:bodyPr rtlCol="0" anchor="ctr"/>
+          <a:lstStyle/>
+          <a:p>
+            <a:pPr algn="ctr"/>
+            <a:endParaRPr kumimoji="1" lang="ja-JP" altLang="en-US"/>
+          </a:p>
+        </p:txBody>
+      </p:sp>
+      <p:sp>
+        <p:nvSpPr>
+          <p:cNvPr id="18" name="正方形/長方形 17"/>
+          <p:cNvSpPr/>
+          <p:nvPr/>
+        </p:nvSpPr>
+        <p:spPr>
+          <a:xfrm>
+            <a:off x="1602523" y="3645877"/>
+            <a:ext cx="1562708" cy="193342"/>
+          </a:xfrm>
+          <a:prstGeom prst="rect">
+            <a:avLst/>
+          </a:prstGeom>
+          <a:noFill/>
+          <a:ln>
+            <a:solidFill>
+              <a:schemeClr val="accent3"/>
+            </a:solidFill>
+          </a:ln>
+        </p:spPr>
+        <p:style>
+          <a:lnRef idx="2">
+            <a:schemeClr val="accent1">
+              <a:shade val="50000"/>
+            </a:schemeClr>
+          </a:lnRef>
+          <a:fillRef idx="1">
+            <a:schemeClr val="accent1"/>
+          </a:fillRef>
+          <a:effectRef idx="0">
+            <a:schemeClr val="accent1"/>
+          </a:effectRef>
+          <a:fontRef idx="minor">
+            <a:schemeClr val="lt1"/>
+          </a:fontRef>
+        </p:style>
+        <p:txBody>
+          <a:bodyPr rtlCol="0" anchor="ctr"/>
+          <a:lstStyle/>
+          <a:p>
+            <a:pPr algn="ctr"/>
+            <a:endParaRPr kumimoji="1" lang="ja-JP" altLang="en-US"/>
+          </a:p>
+        </p:txBody>
+      </p:sp>
+      <p:cxnSp>
+        <p:nvCxnSpPr>
+          <p:cNvPr id="19" name="直線矢印コネクタ 18"/>
+          <p:cNvCxnSpPr>
+            <a:stCxn id="17" idx="0"/>
+          </p:cNvCxnSpPr>
+          <p:nvPr/>
+        </p:nvCxnSpPr>
+        <p:spPr>
+          <a:xfrm flipH="1" flipV="1">
+            <a:off x="2482069" y="3821418"/>
+            <a:ext cx="148244" cy="586506"/>
+          </a:xfrm>
+          <a:prstGeom prst="straightConnector1">
+            <a:avLst/>
+          </a:prstGeom>
+          <a:ln>
+            <a:tailEnd type="triangle"/>
+          </a:ln>
+        </p:spPr>
+        <p:style>
+          <a:lnRef idx="1">
+            <a:schemeClr val="accent3"/>
+          </a:lnRef>
+          <a:fillRef idx="0">
+            <a:schemeClr val="accent3"/>
+          </a:fillRef>
+          <a:effectRef idx="0">
+            <a:schemeClr val="accent3"/>
+          </a:effectRef>
+          <a:fontRef idx="minor">
+            <a:schemeClr val="tx1"/>
+          </a:fontRef>
+        </p:style>
+      </p:cxnSp>
+      <p:cxnSp>
+        <p:nvCxnSpPr>
+          <p:cNvPr id="23" name="直線矢印コネクタ 22"/>
+          <p:cNvCxnSpPr>
+            <a:stCxn id="6" idx="2"/>
+          </p:cNvCxnSpPr>
+          <p:nvPr/>
+        </p:nvCxnSpPr>
+        <p:spPr>
+          <a:xfrm flipH="1">
+            <a:off x="5003847" y="2886330"/>
+            <a:ext cx="875974" cy="1609864"/>
+          </a:xfrm>
+          <a:prstGeom prst="straightConnector1">
+            <a:avLst/>
+          </a:prstGeom>
+          <a:ln>
+            <a:tailEnd type="triangle"/>
+          </a:ln>
+        </p:spPr>
+        <p:style>
+          <a:lnRef idx="1">
+            <a:schemeClr val="accent3"/>
+          </a:lnRef>
+          <a:fillRef idx="0">
+            <a:schemeClr val="accent3"/>
+          </a:fillRef>
+          <a:effectRef idx="0">
+            <a:schemeClr val="accent3"/>
+          </a:effectRef>
+          <a:fontRef idx="minor">
+            <a:schemeClr val="tx1"/>
+          </a:fontRef>
+        </p:style>
+      </p:cxnSp>
+      <p:sp>
+        <p:nvSpPr>
+          <p:cNvPr id="27" name="正方形/長方形 26"/>
+          <p:cNvSpPr/>
+          <p:nvPr/>
+        </p:nvSpPr>
+        <p:spPr>
+          <a:xfrm>
+            <a:off x="3940828" y="2219468"/>
+            <a:ext cx="3592586" cy="666862"/>
+          </a:xfrm>
+          <a:prstGeom prst="rect">
+            <a:avLst/>
+          </a:prstGeom>
+          <a:noFill/>
+          <a:ln>
+            <a:solidFill>
+              <a:schemeClr val="accent3"/>
+            </a:solidFill>
+          </a:ln>
+        </p:spPr>
+        <p:style>
+          <a:lnRef idx="2">
+            <a:schemeClr val="accent3">
+              <a:shade val="50000"/>
+            </a:schemeClr>
+          </a:lnRef>
+          <a:fillRef idx="1">
+            <a:schemeClr val="accent3"/>
+          </a:fillRef>
+          <a:effectRef idx="0">
+            <a:schemeClr val="accent3"/>
+          </a:effectRef>
+          <a:fontRef idx="minor">
+            <a:schemeClr val="lt1"/>
+          </a:fontRef>
+        </p:style>
+        <p:txBody>
+          <a:bodyPr rtlCol="0" anchor="ctr"/>
+          <a:lstStyle/>
+          <a:p>
+            <a:pPr algn="ctr"/>
+            <a:endParaRPr kumimoji="1" lang="ja-JP" altLang="en-US"/>
+          </a:p>
+        </p:txBody>
+      </p:sp>
+      <p:sp>
+        <p:nvSpPr>
+          <p:cNvPr id="30" name="正方形/長方形 29"/>
+          <p:cNvSpPr/>
+          <p:nvPr/>
+        </p:nvSpPr>
+        <p:spPr>
+          <a:xfrm>
+            <a:off x="402336" y="1288298"/>
+            <a:ext cx="2465558" cy="552225"/>
+          </a:xfrm>
+          <a:prstGeom prst="rect">
+            <a:avLst/>
+          </a:prstGeom>
+          <a:noFill/>
+          <a:ln>
+            <a:solidFill>
+              <a:schemeClr val="tx1"/>
+            </a:solidFill>
+          </a:ln>
+        </p:spPr>
+        <p:style>
+          <a:lnRef idx="2">
+            <a:schemeClr val="accent1">
+              <a:shade val="50000"/>
+            </a:schemeClr>
+          </a:lnRef>
+          <a:fillRef idx="1">
+            <a:schemeClr val="accent1"/>
+          </a:fillRef>
+          <a:effectRef idx="0">
+            <a:schemeClr val="accent1"/>
+          </a:effectRef>
+          <a:fontRef idx="minor">
+            <a:schemeClr val="lt1"/>
+          </a:fontRef>
+        </p:style>
+        <p:txBody>
+          <a:bodyPr rtlCol="0" anchor="ctr"/>
+          <a:lstStyle/>
+          <a:p>
+            <a:pPr algn="ctr"/>
+            <a:endParaRPr kumimoji="1" lang="ja-JP" altLang="en-US"/>
+          </a:p>
+        </p:txBody>
+      </p:sp>
+      <p:sp>
+        <p:nvSpPr>
+          <p:cNvPr id="9" name="テキスト ボックス 8"/>
+          <p:cNvSpPr txBox="1"/>
+          <p:nvPr/>
+        </p:nvSpPr>
+        <p:spPr>
+          <a:xfrm>
+            <a:off x="374904" y="1288298"/>
+            <a:ext cx="2492990" cy="646331"/>
+          </a:xfrm>
+          <a:prstGeom prst="rect">
+            <a:avLst/>
+          </a:prstGeom>
+          <a:noFill/>
+        </p:spPr>
+        <p:txBody>
+          <a:bodyPr wrap="none" rtlCol="0">
+            <a:spAutoFit/>
+          </a:bodyPr>
+          <a:lstStyle/>
+          <a:p>
+            <a:r>
+              <a:rPr kumimoji="1" lang="ja-JP" altLang="en-US" sz="3600" dirty="0" smtClean="0">
+                <a:solidFill>
+                  <a:srgbClr val="FFFF00"/>
+                </a:solidFill>
+              </a:rPr>
+              <a:t>常時の操作</a:t>
+            </a:r>
+            <a:endParaRPr kumimoji="1" lang="ja-JP" altLang="en-US" sz="3600" dirty="0">
+              <a:solidFill>
+                <a:srgbClr val="FFFF00"/>
+              </a:solidFill>
+            </a:endParaRPr>
+          </a:p>
+        </p:txBody>
+      </p:sp>
+      <p:sp>
+        <p:nvSpPr>
+          <p:cNvPr id="38" name="テキスト ボックス 37"/>
+          <p:cNvSpPr txBox="1"/>
+          <p:nvPr/>
+        </p:nvSpPr>
+        <p:spPr>
+          <a:xfrm>
+            <a:off x="7848232" y="1288297"/>
+            <a:ext cx="2954655" cy="646331"/>
+          </a:xfrm>
+          <a:prstGeom prst="rect">
+            <a:avLst/>
+          </a:prstGeom>
+          <a:noFill/>
+        </p:spPr>
+        <p:txBody>
+          <a:bodyPr wrap="none" rtlCol="0">
+            <a:spAutoFit/>
+          </a:bodyPr>
+          <a:lstStyle/>
+          <a:p>
+            <a:r>
+              <a:rPr kumimoji="1" lang="ja-JP" altLang="en-US" sz="3600" dirty="0" smtClean="0">
+                <a:solidFill>
+                  <a:srgbClr val="FFFF00"/>
+                </a:solidFill>
+              </a:rPr>
+              <a:t>移動時の操作</a:t>
+            </a:r>
+            <a:endParaRPr kumimoji="1" lang="ja-JP" altLang="en-US" sz="3600" dirty="0">
+              <a:solidFill>
+                <a:srgbClr val="FFFF00"/>
+              </a:solidFill>
+            </a:endParaRPr>
+          </a:p>
+        </p:txBody>
+      </p:sp>
+      <p:sp>
+        <p:nvSpPr>
+          <p:cNvPr id="33" name="正方形/長方形 32"/>
+          <p:cNvSpPr/>
+          <p:nvPr/>
+        </p:nvSpPr>
+        <p:spPr>
+          <a:xfrm>
+            <a:off x="7818813" y="1210573"/>
+            <a:ext cx="2919047" cy="629950"/>
+          </a:xfrm>
+          <a:prstGeom prst="rect">
+            <a:avLst/>
+          </a:prstGeom>
+          <a:noFill/>
+          <a:ln>
+            <a:solidFill>
+              <a:schemeClr val="tx1"/>
+            </a:solidFill>
+          </a:ln>
+        </p:spPr>
+        <p:style>
+          <a:lnRef idx="2">
+            <a:schemeClr val="accent1">
+              <a:shade val="50000"/>
+            </a:schemeClr>
+          </a:lnRef>
+          <a:fillRef idx="1">
+            <a:schemeClr val="accent1"/>
+          </a:fillRef>
+          <a:effectRef idx="0">
+            <a:schemeClr val="accent1"/>
+          </a:effectRef>
+          <a:fontRef idx="minor">
+            <a:schemeClr val="lt1"/>
+          </a:fontRef>
+        </p:style>
+        <p:txBody>
+          <a:bodyPr rtlCol="0" anchor="ctr"/>
+          <a:lstStyle/>
+          <a:p>
+            <a:pPr algn="ctr"/>
+            <a:endParaRPr kumimoji="1" lang="ja-JP" altLang="en-US"/>
+          </a:p>
+        </p:txBody>
+      </p:sp>
+      <p:pic>
+        <p:nvPicPr>
+          <p:cNvPr id="40" name="Picture 2" descr="上から見たマウスのイラスト | かわいいフリー素材集 いらすとや"/>
+          <p:cNvPicPr>
+            <a:picLocks noChangeAspect="1" noChangeArrowheads="1"/>
+          </p:cNvPicPr>
+          <p:nvPr/>
+        </p:nvPicPr>
+        <p:blipFill>
+          <a:blip r:embed="rId4" cstate="print">
+            <a:extLst>
+              <a:ext uri="{28A0092B-C50C-407E-A947-70E740481C1C}">
+                <a14:useLocalDpi xmlns:a14="http://schemas.microsoft.com/office/drawing/2010/main" val="0"/>
+              </a:ext>
+            </a:extLst>
+          </a:blip>
+          <a:srcRect/>
+          <a:stretch>
+            <a:fillRect/>
+          </a:stretch>
+        </p:blipFill>
+        <p:spPr bwMode="auto">
+          <a:xfrm>
+            <a:off x="9000201" y="2623678"/>
+            <a:ext cx="984128" cy="1172407"/>
+          </a:xfrm>
+          <a:prstGeom prst="rect">
+            <a:avLst/>
+          </a:prstGeom>
+          <a:noFill/>
+          <a:extLst>
+            <a:ext uri="{909E8E84-426E-40DD-AFC4-6F175D3DCCD1}">
+              <a14:hiddenFill xmlns:a14="http://schemas.microsoft.com/office/drawing/2010/main">
+                <a:solidFill>
+                  <a:srgbClr val="FFFFFF"/>
+                </a:solidFill>
+              </a14:hiddenFill>
+            </a:ext>
+          </a:extLst>
+        </p:spPr>
+      </p:pic>
+      <p:sp>
+        <p:nvSpPr>
+          <p:cNvPr id="41" name="正方形/長方形 40"/>
+          <p:cNvSpPr/>
+          <p:nvPr/>
+        </p:nvSpPr>
+        <p:spPr>
+          <a:xfrm>
+            <a:off x="7941614" y="2193831"/>
+            <a:ext cx="3664232" cy="369333"/>
+          </a:xfrm>
+          <a:prstGeom prst="rect">
+            <a:avLst/>
+          </a:prstGeom>
+          <a:noFill/>
+          <a:ln>
+            <a:solidFill>
+              <a:schemeClr val="accent3"/>
+            </a:solidFill>
+          </a:ln>
+        </p:spPr>
+        <p:style>
+          <a:lnRef idx="2">
+            <a:schemeClr val="accent3">
+              <a:shade val="50000"/>
+            </a:schemeClr>
+          </a:lnRef>
+          <a:fillRef idx="1">
+            <a:schemeClr val="accent3"/>
+          </a:fillRef>
+          <a:effectRef idx="0">
+            <a:schemeClr val="accent3"/>
+          </a:effectRef>
+          <a:fontRef idx="minor">
+            <a:schemeClr val="lt1"/>
+          </a:fontRef>
+        </p:style>
+        <p:txBody>
+          <a:bodyPr rtlCol="0" anchor="ctr"/>
+          <a:lstStyle/>
+          <a:p>
+            <a:pPr algn="ctr"/>
+            <a:endParaRPr kumimoji="1" lang="ja-JP" altLang="en-US"/>
+          </a:p>
+        </p:txBody>
+      </p:sp>
+      <p:sp>
+        <p:nvSpPr>
+          <p:cNvPr id="42" name="正方形/長方形 41"/>
+          <p:cNvSpPr/>
+          <p:nvPr/>
+        </p:nvSpPr>
+        <p:spPr>
+          <a:xfrm>
+            <a:off x="4887973" y="4150775"/>
+            <a:ext cx="652205" cy="635643"/>
+          </a:xfrm>
+          <a:prstGeom prst="rect">
+            <a:avLst/>
+          </a:prstGeom>
+          <a:noFill/>
+          <a:ln>
+            <a:solidFill>
+              <a:schemeClr val="accent3"/>
+            </a:solidFill>
+          </a:ln>
+        </p:spPr>
+        <p:style>
+          <a:lnRef idx="2">
+            <a:schemeClr val="accent3">
+              <a:shade val="50000"/>
+            </a:schemeClr>
+          </a:lnRef>
+          <a:fillRef idx="1">
+            <a:schemeClr val="accent3"/>
+          </a:fillRef>
+          <a:effectRef idx="0">
+            <a:schemeClr val="accent3"/>
+          </a:effectRef>
+          <a:fontRef idx="minor">
+            <a:schemeClr val="lt1"/>
+          </a:fontRef>
+        </p:style>
+        <p:txBody>
+          <a:bodyPr rtlCol="0" anchor="ctr"/>
+          <a:lstStyle/>
+          <a:p>
+            <a:pPr algn="ctr"/>
+            <a:endParaRPr kumimoji="1" lang="ja-JP" altLang="en-US"/>
+          </a:p>
+        </p:txBody>
+      </p:sp>
+      <p:sp>
+        <p:nvSpPr>
+          <p:cNvPr id="22" name="正方形/長方形 21"/>
+          <p:cNvSpPr/>
+          <p:nvPr/>
+        </p:nvSpPr>
+        <p:spPr>
+          <a:xfrm>
+            <a:off x="9194987" y="2916473"/>
+            <a:ext cx="249357" cy="342542"/>
+          </a:xfrm>
+          <a:prstGeom prst="rect">
+            <a:avLst/>
+          </a:prstGeom>
+          <a:noFill/>
+          <a:ln>
+            <a:solidFill>
+              <a:schemeClr val="accent3"/>
+            </a:solidFill>
+          </a:ln>
+        </p:spPr>
+        <p:style>
+          <a:lnRef idx="2">
+            <a:schemeClr val="accent3">
+              <a:shade val="50000"/>
+            </a:schemeClr>
+          </a:lnRef>
+          <a:fillRef idx="1">
+            <a:schemeClr val="accent3"/>
+          </a:fillRef>
+          <a:effectRef idx="0">
+            <a:schemeClr val="accent3"/>
+          </a:effectRef>
+          <a:fontRef idx="minor">
+            <a:schemeClr val="lt1"/>
+          </a:fontRef>
+        </p:style>
+        <p:txBody>
+          <a:bodyPr rtlCol="0" anchor="ctr"/>
+          <a:lstStyle/>
+          <a:p>
+            <a:pPr algn="ctr"/>
+            <a:endParaRPr kumimoji="1" lang="ja-JP" altLang="en-US"/>
+          </a:p>
+        </p:txBody>
+      </p:sp>
+      <p:cxnSp>
+        <p:nvCxnSpPr>
+          <p:cNvPr id="43" name="直線矢印コネクタ 42"/>
+          <p:cNvCxnSpPr>
+            <a:endCxn id="22" idx="1"/>
+          </p:cNvCxnSpPr>
+          <p:nvPr/>
+        </p:nvCxnSpPr>
+        <p:spPr>
+          <a:xfrm>
+            <a:off x="7949349" y="2563164"/>
+            <a:ext cx="1245638" cy="524580"/>
+          </a:xfrm>
+          <a:prstGeom prst="straightConnector1">
+            <a:avLst/>
+          </a:prstGeom>
+          <a:ln>
+            <a:tailEnd type="triangle"/>
+          </a:ln>
+        </p:spPr>
+        <p:style>
+          <a:lnRef idx="1">
+            <a:schemeClr val="accent3"/>
+          </a:lnRef>
+          <a:fillRef idx="0">
+            <a:schemeClr val="accent3"/>
+          </a:fillRef>
+          <a:effectRef idx="0">
+            <a:schemeClr val="accent3"/>
+          </a:effectRef>
+          <a:fontRef idx="minor">
+            <a:schemeClr val="tx1"/>
+          </a:fontRef>
+        </p:style>
+      </p:cxnSp>
+      <p:sp>
+        <p:nvSpPr>
+          <p:cNvPr id="46" name="正方形/長方形 45"/>
+          <p:cNvSpPr/>
+          <p:nvPr/>
+        </p:nvSpPr>
+        <p:spPr>
+          <a:xfrm>
+            <a:off x="7769169" y="1840095"/>
+            <a:ext cx="4386694" cy="1981323"/>
+          </a:xfrm>
+          <a:prstGeom prst="rect">
+            <a:avLst/>
+          </a:prstGeom>
+          <a:noFill/>
+          <a:ln>
+            <a:solidFill>
+              <a:schemeClr val="tx1">
+                <a:alpha val="95000"/>
+              </a:schemeClr>
+            </a:solidFill>
+          </a:ln>
+        </p:spPr>
+        <p:style>
+          <a:lnRef idx="2">
+            <a:schemeClr val="accent1">
+              <a:shade val="50000"/>
+            </a:schemeClr>
+          </a:lnRef>
+          <a:fillRef idx="1">
+            <a:schemeClr val="accent1"/>
+          </a:fillRef>
+          <a:effectRef idx="0">
+            <a:schemeClr val="accent1"/>
+          </a:effectRef>
+          <a:fontRef idx="minor">
+            <a:schemeClr val="lt1"/>
+          </a:fontRef>
+        </p:style>
+        <p:txBody>
+          <a:bodyPr rtlCol="0" anchor="ctr"/>
+          <a:lstStyle/>
+          <a:p>
+            <a:pPr algn="ctr"/>
+            <a:endParaRPr kumimoji="1" lang="ja-JP" altLang="en-US"/>
+          </a:p>
+        </p:txBody>
+      </p:sp>
+      <p:sp>
+        <p:nvSpPr>
+          <p:cNvPr id="48" name="テキスト ボックス 47"/>
+          <p:cNvSpPr txBox="1"/>
+          <p:nvPr/>
+        </p:nvSpPr>
+        <p:spPr>
+          <a:xfrm>
+            <a:off x="7848232" y="4031802"/>
+            <a:ext cx="2954655" cy="646331"/>
+          </a:xfrm>
+          <a:prstGeom prst="rect">
+            <a:avLst/>
+          </a:prstGeom>
+          <a:noFill/>
+        </p:spPr>
+        <p:txBody>
+          <a:bodyPr wrap="none" rtlCol="0">
+            <a:spAutoFit/>
+          </a:bodyPr>
+          <a:lstStyle/>
+          <a:p>
+            <a:r>
+              <a:rPr kumimoji="1" lang="ja-JP" altLang="en-US" sz="3600" dirty="0" smtClean="0">
+                <a:solidFill>
+                  <a:srgbClr val="FFFF00"/>
+                </a:solidFill>
+              </a:rPr>
+              <a:t>攻撃時の操作</a:t>
+            </a:r>
+            <a:endParaRPr kumimoji="1" lang="ja-JP" altLang="en-US" sz="3600" dirty="0">
+              <a:solidFill>
+                <a:srgbClr val="FFFF00"/>
+              </a:solidFill>
+            </a:endParaRPr>
+          </a:p>
+        </p:txBody>
+      </p:sp>
+      <p:sp>
+        <p:nvSpPr>
+          <p:cNvPr id="49" name="正方形/長方形 48"/>
+          <p:cNvSpPr/>
+          <p:nvPr/>
+        </p:nvSpPr>
+        <p:spPr>
+          <a:xfrm>
+            <a:off x="7818813" y="3954078"/>
+            <a:ext cx="2919047" cy="629950"/>
+          </a:xfrm>
+          <a:prstGeom prst="rect">
+            <a:avLst/>
+          </a:prstGeom>
+          <a:noFill/>
+          <a:ln>
+            <a:solidFill>
+              <a:schemeClr val="tx1"/>
+            </a:solidFill>
+          </a:ln>
+        </p:spPr>
+        <p:style>
+          <a:lnRef idx="2">
+            <a:schemeClr val="accent1">
+              <a:shade val="50000"/>
+            </a:schemeClr>
+          </a:lnRef>
+          <a:fillRef idx="1">
+            <a:schemeClr val="accent1"/>
+          </a:fillRef>
+          <a:effectRef idx="0">
+            <a:schemeClr val="accent1"/>
+          </a:effectRef>
+          <a:fontRef idx="minor">
+            <a:schemeClr val="lt1"/>
+          </a:fontRef>
+        </p:style>
+        <p:txBody>
+          <a:bodyPr rtlCol="0" anchor="ctr"/>
+          <a:lstStyle/>
+          <a:p>
+            <a:pPr algn="ctr"/>
+            <a:endParaRPr kumimoji="1" lang="ja-JP" altLang="en-US"/>
+          </a:p>
+        </p:txBody>
+      </p:sp>
+      <p:pic>
+        <p:nvPicPr>
+          <p:cNvPr id="50" name="Picture 2" descr="上から見たマウスのイラスト | かわいいフリー素材集 いらすとや"/>
+          <p:cNvPicPr>
+            <a:picLocks noChangeAspect="1" noChangeArrowheads="1"/>
+          </p:cNvPicPr>
+          <p:nvPr/>
+        </p:nvPicPr>
+        <p:blipFill>
+          <a:blip r:embed="rId4" cstate="print">
+            <a:extLst>
+              <a:ext uri="{28A0092B-C50C-407E-A947-70E740481C1C}">
+                <a14:useLocalDpi xmlns:a14="http://schemas.microsoft.com/office/drawing/2010/main" val="0"/>
+              </a:ext>
+            </a:extLst>
+          </a:blip>
+          <a:srcRect/>
+          <a:stretch>
+            <a:fillRect/>
+          </a:stretch>
+        </p:blipFill>
+        <p:spPr bwMode="auto">
+          <a:xfrm>
+            <a:off x="9000201" y="5367183"/>
+            <a:ext cx="984128" cy="1172407"/>
+          </a:xfrm>
+          <a:prstGeom prst="rect">
+            <a:avLst/>
+          </a:prstGeom>
+          <a:noFill/>
+          <a:extLst>
+            <a:ext uri="{909E8E84-426E-40DD-AFC4-6F175D3DCCD1}">
+              <a14:hiddenFill xmlns:a14="http://schemas.microsoft.com/office/drawing/2010/main">
+                <a:solidFill>
+                  <a:srgbClr val="FFFFFF"/>
+                </a:solidFill>
+              </a14:hiddenFill>
+            </a:ext>
+          </a:extLst>
+        </p:spPr>
+      </p:pic>
+      <p:sp>
+        <p:nvSpPr>
+          <p:cNvPr id="51" name="正方形/長方形 50"/>
+          <p:cNvSpPr/>
+          <p:nvPr/>
+        </p:nvSpPr>
+        <p:spPr>
+          <a:xfrm>
+            <a:off x="7769169" y="4583600"/>
+            <a:ext cx="4386694" cy="1981323"/>
+          </a:xfrm>
+          <a:prstGeom prst="rect">
+            <a:avLst/>
+          </a:prstGeom>
+          <a:noFill/>
+          <a:ln>
+            <a:solidFill>
+              <a:schemeClr val="tx1">
+                <a:alpha val="95000"/>
+              </a:schemeClr>
+            </a:solidFill>
+          </a:ln>
+        </p:spPr>
+        <p:style>
+          <a:lnRef idx="2">
+            <a:schemeClr val="accent1">
+              <a:shade val="50000"/>
+            </a:schemeClr>
+          </a:lnRef>
+          <a:fillRef idx="1">
+            <a:schemeClr val="accent1"/>
+          </a:fillRef>
+          <a:effectRef idx="0">
+            <a:schemeClr val="accent1"/>
+          </a:effectRef>
+          <a:fontRef idx="minor">
+            <a:schemeClr val="lt1"/>
+          </a:fontRef>
+        </p:style>
+        <p:txBody>
+          <a:bodyPr rtlCol="0" anchor="ctr"/>
+          <a:lstStyle/>
+          <a:p>
+            <a:pPr algn="ctr"/>
+            <a:endParaRPr kumimoji="1" lang="ja-JP" altLang="en-US"/>
+          </a:p>
+        </p:txBody>
+      </p:sp>
+      <p:cxnSp>
+        <p:nvCxnSpPr>
+          <p:cNvPr id="52" name="直線矢印コネクタ 51"/>
+          <p:cNvCxnSpPr/>
+          <p:nvPr/>
+        </p:nvCxnSpPr>
+        <p:spPr>
+          <a:xfrm>
+            <a:off x="8572168" y="5275425"/>
+            <a:ext cx="615084" cy="577130"/>
+          </a:xfrm>
+          <a:prstGeom prst="straightConnector1">
+            <a:avLst/>
+          </a:prstGeom>
+          <a:ln>
+            <a:tailEnd type="triangle"/>
+          </a:ln>
+        </p:spPr>
+        <p:style>
+          <a:lnRef idx="1">
+            <a:schemeClr val="accent3"/>
+          </a:lnRef>
+          <a:fillRef idx="0">
+            <a:schemeClr val="accent3"/>
+          </a:fillRef>
+          <a:effectRef idx="0">
+            <a:schemeClr val="accent3"/>
+          </a:effectRef>
+          <a:fontRef idx="minor">
+            <a:schemeClr val="tx1"/>
+          </a:fontRef>
+        </p:style>
+      </p:cxnSp>
+      <p:sp>
+        <p:nvSpPr>
+          <p:cNvPr id="54" name="正方形/長方形 53"/>
+          <p:cNvSpPr/>
+          <p:nvPr/>
+        </p:nvSpPr>
+        <p:spPr>
+          <a:xfrm>
+            <a:off x="8572168" y="4906092"/>
+            <a:ext cx="2031325" cy="369333"/>
+          </a:xfrm>
+          <a:prstGeom prst="rect">
+            <a:avLst/>
+          </a:prstGeom>
+          <a:noFill/>
+          <a:ln>
+            <a:solidFill>
+              <a:schemeClr val="accent3"/>
+            </a:solidFill>
+          </a:ln>
+        </p:spPr>
+        <p:style>
+          <a:lnRef idx="2">
+            <a:schemeClr val="accent3">
+              <a:shade val="50000"/>
+            </a:schemeClr>
+          </a:lnRef>
+          <a:fillRef idx="1">
+            <a:schemeClr val="accent3"/>
+          </a:fillRef>
+          <a:effectRef idx="0">
+            <a:schemeClr val="accent3"/>
+          </a:effectRef>
+          <a:fontRef idx="minor">
+            <a:schemeClr val="lt1"/>
+          </a:fontRef>
+        </p:style>
+        <p:txBody>
+          <a:bodyPr rtlCol="0" anchor="ctr"/>
+          <a:lstStyle/>
+          <a:p>
+            <a:pPr algn="ctr"/>
+            <a:endParaRPr kumimoji="1" lang="ja-JP" altLang="en-US"/>
+          </a:p>
+        </p:txBody>
+      </p:sp>
+      <p:sp>
+        <p:nvSpPr>
+          <p:cNvPr id="56" name="正方形/長方形 55"/>
+          <p:cNvSpPr/>
+          <p:nvPr/>
+        </p:nvSpPr>
+        <p:spPr>
+          <a:xfrm>
+            <a:off x="9117691" y="5644756"/>
+            <a:ext cx="326653" cy="308629"/>
+          </a:xfrm>
+          <a:prstGeom prst="rect">
+            <a:avLst/>
+          </a:prstGeom>
+          <a:noFill/>
+          <a:ln>
+            <a:solidFill>
+              <a:schemeClr val="accent3"/>
+            </a:solidFill>
+          </a:ln>
+        </p:spPr>
+        <p:style>
+          <a:lnRef idx="2">
+            <a:schemeClr val="accent3">
+              <a:shade val="50000"/>
+            </a:schemeClr>
+          </a:lnRef>
+          <a:fillRef idx="1">
+            <a:schemeClr val="accent3"/>
+          </a:fillRef>
+          <a:effectRef idx="0">
+            <a:schemeClr val="accent3"/>
+          </a:effectRef>
+          <a:fontRef idx="minor">
+            <a:schemeClr val="lt1"/>
+          </a:fontRef>
+        </p:style>
+        <p:txBody>
+          <a:bodyPr rtlCol="0" anchor="ctr"/>
+          <a:lstStyle/>
+          <a:p>
+            <a:pPr algn="ctr"/>
+            <a:endParaRPr kumimoji="1" lang="ja-JP" altLang="en-US"/>
+          </a:p>
+        </p:txBody>
+      </p:sp>
     </p:spTree>
     <p:extLst>
       <p:ext uri="{BB962C8B-B14F-4D97-AF65-F5344CB8AC3E}">
@@ -7528,6 +9726,13 @@
   <p:clrMapOvr>
     <a:masterClrMapping/>
   </p:clrMapOvr>
+  <p:timing>
+    <p:tnLst>
+      <p:par>
+        <p:cTn id="1" dur="indefinite" restart="never" nodeType="tmRoot"/>
+      </p:par>
+    </p:tnLst>
+  </p:timing>
 </p:sld>
 </file>
 

--- a/ゲーム制作企画書.pptx
+++ b/ゲーム制作企画書.pptx
@@ -302,7 +302,7 @@
           <a:p>
             <a:fld id="{021EE310-EC55-4FE5-9459-5D3CEDE369C6}" type="datetimeFigureOut">
               <a:rPr kumimoji="1" lang="ja-JP" altLang="en-US" smtClean="0"/>
-              <a:t>2025/12/11</a:t>
+              <a:t>2025/12/16</a:t>
             </a:fld>
             <a:endParaRPr kumimoji="1" lang="ja-JP" altLang="en-US"/>
           </a:p>
@@ -577,7 +577,7 @@
           <a:p>
             <a:fld id="{021EE310-EC55-4FE5-9459-5D3CEDE369C6}" type="datetimeFigureOut">
               <a:rPr kumimoji="1" lang="ja-JP" altLang="en-US" smtClean="0"/>
-              <a:t>2025/12/11</a:t>
+              <a:t>2025/12/16</a:t>
             </a:fld>
             <a:endParaRPr kumimoji="1" lang="ja-JP" altLang="en-US"/>
           </a:p>
@@ -771,7 +771,7 @@
           <a:p>
             <a:fld id="{021EE310-EC55-4FE5-9459-5D3CEDE369C6}" type="datetimeFigureOut">
               <a:rPr kumimoji="1" lang="ja-JP" altLang="en-US" smtClean="0"/>
-              <a:t>2025/12/11</a:t>
+              <a:t>2025/12/16</a:t>
             </a:fld>
             <a:endParaRPr kumimoji="1" lang="ja-JP" altLang="en-US"/>
           </a:p>
@@ -1044,7 +1044,7 @@
           <a:p>
             <a:fld id="{021EE310-EC55-4FE5-9459-5D3CEDE369C6}" type="datetimeFigureOut">
               <a:rPr kumimoji="1" lang="ja-JP" altLang="en-US" smtClean="0"/>
-              <a:t>2025/12/11</a:t>
+              <a:t>2025/12/16</a:t>
             </a:fld>
             <a:endParaRPr kumimoji="1" lang="ja-JP" altLang="en-US"/>
           </a:p>
@@ -1385,7 +1385,7 @@
           <a:p>
             <a:fld id="{021EE310-EC55-4FE5-9459-5D3CEDE369C6}" type="datetimeFigureOut">
               <a:rPr kumimoji="1" lang="ja-JP" altLang="en-US" smtClean="0"/>
-              <a:t>2025/12/11</a:t>
+              <a:t>2025/12/16</a:t>
             </a:fld>
             <a:endParaRPr kumimoji="1" lang="ja-JP" altLang="en-US"/>
           </a:p>
@@ -2008,7 +2008,7 @@
           <a:p>
             <a:fld id="{021EE310-EC55-4FE5-9459-5D3CEDE369C6}" type="datetimeFigureOut">
               <a:rPr kumimoji="1" lang="ja-JP" altLang="en-US" smtClean="0"/>
-              <a:t>2025/12/11</a:t>
+              <a:t>2025/12/16</a:t>
             </a:fld>
             <a:endParaRPr kumimoji="1" lang="ja-JP" altLang="en-US"/>
           </a:p>
@@ -2868,7 +2868,7 @@
           <a:p>
             <a:fld id="{021EE310-EC55-4FE5-9459-5D3CEDE369C6}" type="datetimeFigureOut">
               <a:rPr kumimoji="1" lang="ja-JP" altLang="en-US" smtClean="0"/>
-              <a:t>2025/12/11</a:t>
+              <a:t>2025/12/16</a:t>
             </a:fld>
             <a:endParaRPr kumimoji="1" lang="ja-JP" altLang="en-US"/>
           </a:p>
@@ -3070,7 +3070,7 @@
           <a:p>
             <a:fld id="{021EE310-EC55-4FE5-9459-5D3CEDE369C6}" type="datetimeFigureOut">
               <a:rPr kumimoji="1" lang="ja-JP" altLang="en-US" smtClean="0"/>
-              <a:t>2025/12/11</a:t>
+              <a:t>2025/12/16</a:t>
             </a:fld>
             <a:endParaRPr kumimoji="1" lang="ja-JP" altLang="en-US"/>
           </a:p>
@@ -3282,7 +3282,7 @@
           <a:p>
             <a:fld id="{021EE310-EC55-4FE5-9459-5D3CEDE369C6}" type="datetimeFigureOut">
               <a:rPr kumimoji="1" lang="ja-JP" altLang="en-US" smtClean="0"/>
-              <a:t>2025/12/11</a:t>
+              <a:t>2025/12/16</a:t>
             </a:fld>
             <a:endParaRPr kumimoji="1" lang="ja-JP" altLang="en-US"/>
           </a:p>
@@ -3484,7 +3484,7 @@
           <a:p>
             <a:fld id="{021EE310-EC55-4FE5-9459-5D3CEDE369C6}" type="datetimeFigureOut">
               <a:rPr kumimoji="1" lang="ja-JP" altLang="en-US" smtClean="0"/>
-              <a:t>2025/12/11</a:t>
+              <a:t>2025/12/16</a:t>
             </a:fld>
             <a:endParaRPr kumimoji="1" lang="ja-JP" altLang="en-US"/>
           </a:p>
@@ -3731,7 +3731,7 @@
           <a:p>
             <a:fld id="{021EE310-EC55-4FE5-9459-5D3CEDE369C6}" type="datetimeFigureOut">
               <a:rPr kumimoji="1" lang="ja-JP" altLang="en-US" smtClean="0"/>
-              <a:t>2025/12/11</a:t>
+              <a:t>2025/12/16</a:t>
             </a:fld>
             <a:endParaRPr kumimoji="1" lang="ja-JP" altLang="en-US"/>
           </a:p>
@@ -4087,7 +4087,7 @@
           <a:p>
             <a:fld id="{021EE310-EC55-4FE5-9459-5D3CEDE369C6}" type="datetimeFigureOut">
               <a:rPr kumimoji="1" lang="ja-JP" altLang="en-US" smtClean="0"/>
-              <a:t>2025/12/11</a:t>
+              <a:t>2025/12/16</a:t>
             </a:fld>
             <a:endParaRPr kumimoji="1" lang="ja-JP" altLang="en-US"/>
           </a:p>
@@ -4595,7 +4595,7 @@
           <a:p>
             <a:fld id="{021EE310-EC55-4FE5-9459-5D3CEDE369C6}" type="datetimeFigureOut">
               <a:rPr kumimoji="1" lang="ja-JP" altLang="en-US" smtClean="0"/>
-              <a:t>2025/12/11</a:t>
+              <a:t>2025/12/16</a:t>
             </a:fld>
             <a:endParaRPr kumimoji="1" lang="ja-JP" altLang="en-US"/>
           </a:p>
@@ -4713,7 +4713,7 @@
           <a:p>
             <a:fld id="{021EE310-EC55-4FE5-9459-5D3CEDE369C6}" type="datetimeFigureOut">
               <a:rPr kumimoji="1" lang="ja-JP" altLang="en-US" smtClean="0"/>
-              <a:t>2025/12/11</a:t>
+              <a:t>2025/12/16</a:t>
             </a:fld>
             <a:endParaRPr kumimoji="1" lang="ja-JP" altLang="en-US"/>
           </a:p>
@@ -4808,7 +4808,7 @@
           <a:p>
             <a:fld id="{021EE310-EC55-4FE5-9459-5D3CEDE369C6}" type="datetimeFigureOut">
               <a:rPr kumimoji="1" lang="ja-JP" altLang="en-US" smtClean="0"/>
-              <a:t>2025/12/11</a:t>
+              <a:t>2025/12/16</a:t>
             </a:fld>
             <a:endParaRPr kumimoji="1" lang="ja-JP" altLang="en-US"/>
           </a:p>
@@ -5119,7 +5119,7 @@
           <a:p>
             <a:fld id="{021EE310-EC55-4FE5-9459-5D3CEDE369C6}" type="datetimeFigureOut">
               <a:rPr kumimoji="1" lang="ja-JP" altLang="en-US" smtClean="0"/>
-              <a:t>2025/12/11</a:t>
+              <a:t>2025/12/16</a:t>
             </a:fld>
             <a:endParaRPr kumimoji="1" lang="ja-JP" altLang="en-US"/>
           </a:p>
@@ -5394,7 +5394,7 @@
           <a:p>
             <a:fld id="{021EE310-EC55-4FE5-9459-5D3CEDE369C6}" type="datetimeFigureOut">
               <a:rPr kumimoji="1" lang="ja-JP" altLang="en-US" smtClean="0"/>
-              <a:t>2025/12/11</a:t>
+              <a:t>2025/12/16</a:t>
             </a:fld>
             <a:endParaRPr kumimoji="1" lang="ja-JP" altLang="en-US"/>
           </a:p>
@@ -5855,7 +5855,7 @@
           <a:p>
             <a:fld id="{021EE310-EC55-4FE5-9459-5D3CEDE369C6}" type="datetimeFigureOut">
               <a:rPr kumimoji="1" lang="ja-JP" altLang="en-US" smtClean="0"/>
-              <a:t>2025/12/11</a:t>
+              <a:t>2025/12/16</a:t>
             </a:fld>
             <a:endParaRPr kumimoji="1" lang="ja-JP" altLang="en-US"/>
           </a:p>
@@ -6500,6 +6500,14 @@
             </a:r>
             <a:r>
               <a:rPr kumimoji="1" lang="en-US" altLang="ja-JP" dirty="0" smtClean="0"/>
+              <a:t>Engine</a:t>
+            </a:r>
+            <a:r>
+              <a:rPr kumimoji="1" lang="ja-JP" altLang="en-US" dirty="0" smtClean="0"/>
+              <a:t>　</a:t>
+            </a:r>
+            <a:r>
+              <a:rPr kumimoji="1" lang="en-US" altLang="ja-JP" dirty="0" smtClean="0"/>
               <a:t>version5.5</a:t>
             </a:r>
           </a:p>
@@ -6956,11 +6964,15 @@
             </a:r>
             <a:r>
               <a:rPr kumimoji="1" lang="ja-JP" altLang="en-US" sz="2000" dirty="0" smtClean="0"/>
-              <a:t>の</a:t>
+              <a:t>のサードパー</a:t>
+            </a:r>
+            <a:r>
+              <a:rPr lang="ja-JP" altLang="en-US" sz="2000" dirty="0"/>
+              <a:t>ソン</a:t>
             </a:r>
             <a:r>
               <a:rPr kumimoji="1" lang="ja-JP" altLang="en-US" sz="2000" dirty="0" smtClean="0"/>
-              <a:t>サードパーンアクションゲームです</a:t>
+              <a:t>アクションゲームです</a:t>
             </a:r>
             <a:endParaRPr kumimoji="1" lang="en-US" altLang="ja-JP" sz="2000" dirty="0" smtClean="0"/>
           </a:p>
@@ -6974,11 +6986,7 @@
             </a:r>
             <a:r>
               <a:rPr lang="ja-JP" altLang="en-US" sz="2000" dirty="0" smtClean="0"/>
-              <a:t>して</a:t>
-            </a:r>
-            <a:r>
-              <a:rPr lang="ja-JP" altLang="en-US" sz="2000" dirty="0"/>
-              <a:t>行います</a:t>
+              <a:t>して宇宙人を倒します</a:t>
             </a:r>
             <a:endParaRPr lang="ja-JP" altLang="en-US" sz="2000" dirty="0"/>
           </a:p>
@@ -6992,11 +7000,7 @@
             </a:r>
             <a:r>
               <a:rPr lang="ja-JP" altLang="en-US" sz="2000" dirty="0" smtClean="0"/>
-              <a:t>まで生き残れば</a:t>
-            </a:r>
-            <a:r>
-              <a:rPr lang="ja-JP" altLang="en-US" sz="2000" dirty="0" smtClean="0"/>
-              <a:t>ゲームクリアです</a:t>
+              <a:t>まで生き残ればゲームクリアです</a:t>
             </a:r>
             <a:endParaRPr kumimoji="1" lang="en-US" altLang="ja-JP" sz="2000" dirty="0" smtClean="0"/>
           </a:p>
@@ -7014,25 +7018,17 @@
             </a:r>
             <a:r>
               <a:rPr kumimoji="1" lang="ja-JP" altLang="en-US" sz="2000" dirty="0" smtClean="0"/>
-              <a:t>がなくなったら</a:t>
-            </a:r>
+              <a:t>がなくなったらゲームオーバーです</a:t>
+            </a:r>
+            <a:endParaRPr kumimoji="1" lang="en-US" altLang="ja-JP" sz="2000" dirty="0" smtClean="0"/>
+          </a:p>
+          <a:p>
+            <a:endParaRPr lang="en-US" altLang="ja-JP" sz="2000" dirty="0"/>
+          </a:p>
+          <a:p>
             <a:r>
               <a:rPr kumimoji="1" lang="ja-JP" altLang="en-US" sz="2000" dirty="0" smtClean="0"/>
-              <a:t>ゲームオーバーです</a:t>
-            </a:r>
-            <a:endParaRPr kumimoji="1" lang="en-US" altLang="ja-JP" sz="2000" dirty="0" smtClean="0"/>
-          </a:p>
-          <a:p>
-            <a:endParaRPr lang="en-US" altLang="ja-JP" sz="2000" dirty="0"/>
-          </a:p>
-          <a:p>
-            <a:r>
-              <a:rPr kumimoji="1" lang="ja-JP" altLang="en-US" sz="2000" dirty="0" smtClean="0"/>
-              <a:t>・ステージによってギミック</a:t>
-            </a:r>
-            <a:r>
-              <a:rPr kumimoji="1" lang="ja-JP" altLang="en-US" sz="2000" dirty="0" smtClean="0"/>
-              <a:t>が</a:t>
+              <a:t>・ステージによってギミックが</a:t>
             </a:r>
             <a:r>
               <a:rPr lang="ja-JP" altLang="en-US" sz="2000" dirty="0"/>
@@ -7046,11 +7042,7 @@
           <a:p>
             <a:r>
               <a:rPr kumimoji="1" lang="ja-JP" altLang="en-US" sz="2000" dirty="0" smtClean="0"/>
-              <a:t>・ステージは</a:t>
-            </a:r>
-            <a:r>
-              <a:rPr kumimoji="1" lang="ja-JP" altLang="en-US" sz="2000" dirty="0" smtClean="0"/>
-              <a:t>４個あります</a:t>
+              <a:t>・ステージは４個あります</a:t>
             </a:r>
             <a:endParaRPr kumimoji="1" lang="en-US" altLang="ja-JP" sz="2000" dirty="0" smtClean="0"/>
           </a:p>
@@ -7060,11 +7052,7 @@
           <a:p>
             <a:r>
               <a:rPr lang="ja-JP" altLang="en-US" sz="2000" dirty="0" smtClean="0"/>
-              <a:t>・ステージクリア後にスコアが表示</a:t>
-            </a:r>
-            <a:r>
-              <a:rPr lang="ja-JP" altLang="en-US" sz="2000" dirty="0" smtClean="0"/>
-              <a:t>されます</a:t>
+              <a:t>・ステージクリア後にスコアが表示されます</a:t>
             </a:r>
             <a:endParaRPr lang="en-US" altLang="ja-JP" sz="2000" dirty="0" smtClean="0"/>
           </a:p>
@@ -7166,7 +7154,7 @@
         </p:nvSpPr>
         <p:spPr>
           <a:xfrm>
-            <a:off x="335632" y="1745673"/>
+            <a:off x="335632" y="1632174"/>
             <a:ext cx="10132467" cy="4767943"/>
           </a:xfrm>
           <a:prstGeom prst="rect">
@@ -7409,7 +7397,7 @@
         </p:blipFill>
         <p:spPr>
           <a:xfrm>
-            <a:off x="2291348" y="1434585"/>
+            <a:off x="2908496" y="2039365"/>
             <a:ext cx="6683180" cy="3600000"/>
           </a:xfrm>
           <a:prstGeom prst="rect">
@@ -7425,7 +7413,7 @@
         </p:nvSpPr>
         <p:spPr>
           <a:xfrm>
-            <a:off x="2772508" y="1617785"/>
+            <a:off x="3406420" y="2191765"/>
             <a:ext cx="996462" cy="304800"/>
           </a:xfrm>
           <a:prstGeom prst="rect">
@@ -7468,15 +7456,13 @@
       <p:cxnSp>
         <p:nvCxnSpPr>
           <p:cNvPr id="8" name="直線矢印コネクタ 7"/>
-          <p:cNvCxnSpPr>
-            <a:stCxn id="10" idx="3"/>
-          </p:cNvCxnSpPr>
+          <p:cNvCxnSpPr/>
           <p:nvPr/>
         </p:nvCxnSpPr>
         <p:spPr>
-          <a:xfrm flipV="1">
-            <a:off x="2210590" y="1770186"/>
-            <a:ext cx="556056" cy="589306"/>
+          <a:xfrm>
+            <a:off x="3381513" y="1792291"/>
+            <a:ext cx="249838" cy="399474"/>
           </a:xfrm>
           <a:prstGeom prst="straightConnector1">
             <a:avLst/>
@@ -7508,8 +7494,8 @@
         </p:nvSpPr>
         <p:spPr>
           <a:xfrm>
-            <a:off x="347579" y="1334070"/>
-            <a:ext cx="1863011" cy="2031325"/>
+            <a:off x="3464977" y="860905"/>
+            <a:ext cx="4171335" cy="923330"/>
           </a:xfrm>
           <a:prstGeom prst="rect">
             <a:avLst/>
@@ -7552,16 +7538,9 @@
               <a:rPr kumimoji="1" lang="ja-JP" altLang="en-US" dirty="0" smtClean="0"/>
               <a:t>敵から攻撃を</a:t>
             </a:r>
-            <a:endParaRPr kumimoji="1" lang="en-US" altLang="ja-JP" dirty="0" smtClean="0"/>
-          </a:p>
-          <a:p>
-            <a:r>
-              <a:rPr lang="ja-JP" altLang="en-US" dirty="0"/>
-              <a:t>食らう</a:t>
-            </a:r>
             <a:r>
               <a:rPr lang="ja-JP" altLang="en-US" dirty="0" smtClean="0"/>
-              <a:t>と</a:t>
+              <a:t>食らうと</a:t>
             </a:r>
             <a:r>
               <a:rPr lang="en-US" altLang="ja-JP" dirty="0" smtClean="0"/>
@@ -7569,43 +7548,18 @@
             </a:r>
             <a:r>
               <a:rPr lang="ja-JP" altLang="en-US" dirty="0" smtClean="0"/>
-              <a:t>１０</a:t>
+              <a:t>１０減り、</a:t>
             </a:r>
             <a:endParaRPr lang="en-US" altLang="ja-JP" dirty="0" smtClean="0"/>
           </a:p>
           <a:p>
-            <a:r>
-              <a:rPr lang="ja-JP" altLang="en-US" dirty="0" smtClean="0"/>
-              <a:t>減り、</a:t>
-            </a:r>
             <a:r>
               <a:rPr lang="en-US" altLang="ja-JP" dirty="0" smtClean="0"/>
               <a:t>HP</a:t>
             </a:r>
             <a:r>
               <a:rPr lang="ja-JP" altLang="en-US" dirty="0" smtClean="0"/>
-              <a:t>が０に</a:t>
-            </a:r>
-            <a:endParaRPr lang="en-US" altLang="ja-JP" dirty="0" smtClean="0"/>
-          </a:p>
-          <a:p>
-            <a:r>
-              <a:rPr lang="ja-JP" altLang="en-US" dirty="0" smtClean="0"/>
-              <a:t>なったら</a:t>
-            </a:r>
-            <a:endParaRPr lang="en-US" altLang="ja-JP" dirty="0" smtClean="0"/>
-          </a:p>
-          <a:p>
-            <a:r>
-              <a:rPr lang="ja-JP" altLang="en-US" dirty="0" smtClean="0"/>
-              <a:t>ゲームオーバー</a:t>
-            </a:r>
-            <a:endParaRPr lang="en-US" altLang="ja-JP" dirty="0" smtClean="0"/>
-          </a:p>
-          <a:p>
-            <a:r>
-              <a:rPr lang="ja-JP" altLang="en-US" dirty="0" err="1"/>
-              <a:t>です</a:t>
+              <a:t>が０になったらゲームオーバーです</a:t>
             </a:r>
             <a:endParaRPr lang="en-US" altLang="ja-JP" dirty="0" smtClean="0"/>
           </a:p>
@@ -7619,8 +7573,8 @@
         </p:nvSpPr>
         <p:spPr>
           <a:xfrm>
-            <a:off x="266821" y="1302023"/>
-            <a:ext cx="1943769" cy="2114937"/>
+            <a:off x="3381514" y="726766"/>
+            <a:ext cx="4254798" cy="1057469"/>
           </a:xfrm>
           <a:prstGeom prst="rect">
             <a:avLst/>
@@ -7665,7 +7619,7 @@
         </p:nvSpPr>
         <p:spPr>
           <a:xfrm>
-            <a:off x="2766645" y="1946032"/>
+            <a:off x="3354249" y="2504621"/>
             <a:ext cx="1383323" cy="304800"/>
           </a:xfrm>
           <a:prstGeom prst="rect">
@@ -7716,8 +7670,8 @@
         </p:nvCxnSpPr>
         <p:spPr>
           <a:xfrm flipV="1">
-            <a:off x="2086350" y="2098432"/>
-            <a:ext cx="680295" cy="2378354"/>
+            <a:off x="2272028" y="2657021"/>
+            <a:ext cx="1082221" cy="1605845"/>
           </a:xfrm>
           <a:prstGeom prst="straightConnector1">
             <a:avLst/>
@@ -7749,8 +7703,8 @@
         </p:nvSpPr>
         <p:spPr>
           <a:xfrm>
-            <a:off x="113722" y="3763905"/>
-            <a:ext cx="2262158" cy="1477328"/>
+            <a:off x="200682" y="3565536"/>
+            <a:ext cx="2160022" cy="1477328"/>
           </a:xfrm>
           <a:prstGeom prst="rect">
             <a:avLst/>
@@ -7758,7 +7712,7 @@
           <a:noFill/>
         </p:spPr>
         <p:txBody>
-          <a:bodyPr wrap="none" rtlCol="0">
+          <a:bodyPr wrap="square" rtlCol="0">
             <a:spAutoFit/>
           </a:bodyPr>
           <a:lstStyle/>
@@ -7788,7 +7742,7 @@
             </a:r>
             <a:r>
               <a:rPr kumimoji="1" lang="ja-JP" altLang="en-US" dirty="0" smtClean="0"/>
-              <a:t>１０</a:t>
+              <a:t>１０、</a:t>
             </a:r>
             <a:endParaRPr kumimoji="1" lang="en-US" altLang="ja-JP" dirty="0" smtClean="0"/>
           </a:p>
@@ -7831,8 +7785,8 @@
         </p:nvSpPr>
         <p:spPr>
           <a:xfrm>
-            <a:off x="148442" y="3712339"/>
-            <a:ext cx="1937908" cy="1528893"/>
+            <a:off x="148442" y="3498419"/>
+            <a:ext cx="2123586" cy="1528893"/>
           </a:xfrm>
           <a:prstGeom prst="rect">
             <a:avLst/>
@@ -7877,7 +7831,7 @@
         </p:nvSpPr>
         <p:spPr>
           <a:xfrm>
-            <a:off x="5076092" y="1434585"/>
+            <a:off x="5743314" y="2039365"/>
             <a:ext cx="527539" cy="304800"/>
           </a:xfrm>
           <a:prstGeom prst="rect">
@@ -7920,13 +7874,15 @@
       <p:cxnSp>
         <p:nvCxnSpPr>
           <p:cNvPr id="18" name="直線矢印コネクタ 17"/>
-          <p:cNvCxnSpPr/>
+          <p:cNvCxnSpPr>
+            <a:stCxn id="21" idx="1"/>
+          </p:cNvCxnSpPr>
           <p:nvPr/>
         </p:nvCxnSpPr>
         <p:spPr>
-          <a:xfrm flipH="1">
-            <a:off x="5339861" y="1042169"/>
-            <a:ext cx="1096108" cy="318978"/>
+          <a:xfrm flipH="1" flipV="1">
+            <a:off x="6270854" y="2191765"/>
+            <a:ext cx="3396324" cy="1827508"/>
           </a:xfrm>
           <a:prstGeom prst="straightConnector1">
             <a:avLst/>
@@ -7958,8 +7914,8 @@
         </p:nvSpPr>
         <p:spPr>
           <a:xfrm>
-            <a:off x="6449674" y="118839"/>
-            <a:ext cx="4339650" cy="923330"/>
+            <a:off x="9854449" y="3498419"/>
+            <a:ext cx="4339650" cy="1200329"/>
           </a:xfrm>
           <a:prstGeom prst="rect">
             <a:avLst/>
@@ -7993,7 +7949,14 @@
             </a:r>
             <a:r>
               <a:rPr lang="ja-JP" altLang="en-US" dirty="0" smtClean="0"/>
-              <a:t>になるまで生き残っていたら</a:t>
+              <a:t>になるまで</a:t>
+            </a:r>
+            <a:endParaRPr lang="en-US" altLang="ja-JP" dirty="0" smtClean="0"/>
+          </a:p>
+          <a:p>
+            <a:r>
+              <a:rPr lang="ja-JP" altLang="en-US" dirty="0" smtClean="0"/>
+              <a:t>生き残っていたら</a:t>
             </a:r>
             <a:endParaRPr lang="en-US" altLang="ja-JP" dirty="0" smtClean="0"/>
           </a:p>
@@ -8022,8 +7985,8 @@
         </p:nvSpPr>
         <p:spPr>
           <a:xfrm>
-            <a:off x="6455945" y="118838"/>
-            <a:ext cx="3203870" cy="1018299"/>
+            <a:off x="9667178" y="3419108"/>
+            <a:ext cx="2249592" cy="1200330"/>
           </a:xfrm>
           <a:prstGeom prst="rect">
             <a:avLst/>
@@ -8068,7 +8031,7 @@
         </p:nvSpPr>
         <p:spPr>
           <a:xfrm>
-            <a:off x="5076092" y="2706470"/>
+            <a:off x="5824626" y="3258000"/>
             <a:ext cx="1113693" cy="1361438"/>
           </a:xfrm>
           <a:prstGeom prst="rect">
@@ -8111,13 +8074,16 @@
       <p:cxnSp>
         <p:nvCxnSpPr>
           <p:cNvPr id="29" name="直線矢印コネクタ 28"/>
-          <p:cNvCxnSpPr/>
+          <p:cNvCxnSpPr>
+            <a:stCxn id="33" idx="0"/>
+            <a:endCxn id="22" idx="2"/>
+          </p:cNvCxnSpPr>
           <p:nvPr/>
         </p:nvCxnSpPr>
         <p:spPr>
-          <a:xfrm flipH="1" flipV="1">
-            <a:off x="6189786" y="3732371"/>
-            <a:ext cx="2429713" cy="1761718"/>
+          <a:xfrm flipV="1">
+            <a:off x="6270853" y="4619438"/>
+            <a:ext cx="110620" cy="1860992"/>
           </a:xfrm>
           <a:prstGeom prst="straightConnector1">
             <a:avLst/>
@@ -8149,7 +8115,7 @@
         </p:nvSpPr>
         <p:spPr>
           <a:xfrm>
-            <a:off x="8619499" y="5427001"/>
+            <a:off x="5143322" y="6488668"/>
             <a:ext cx="2492990" cy="369332"/>
           </a:xfrm>
           <a:prstGeom prst="rect">
@@ -8187,7 +8153,7 @@
         </p:nvSpPr>
         <p:spPr>
           <a:xfrm>
-            <a:off x="8619088" y="5427002"/>
+            <a:off x="5024152" y="6480430"/>
             <a:ext cx="2493401" cy="369332"/>
           </a:xfrm>
           <a:prstGeom prst="rect">
@@ -8553,7 +8519,7 @@
         <p:spPr>
           <a:xfrm>
             <a:off x="3940828" y="2239999"/>
-            <a:ext cx="3877985" cy="646331"/>
+            <a:ext cx="3961002" cy="646331"/>
           </a:xfrm>
           <a:prstGeom prst="rect">
             <a:avLst/>
@@ -8561,7 +8527,7 @@
           <a:noFill/>
         </p:spPr>
         <p:txBody>
-          <a:bodyPr wrap="none" rtlCol="0">
+          <a:bodyPr wrap="square" rtlCol="0">
             <a:spAutoFit/>
           </a:bodyPr>
           <a:lstStyle/>
@@ -8918,7 +8884,7 @@
         <p:spPr>
           <a:xfrm flipH="1">
             <a:off x="5003847" y="2886330"/>
-            <a:ext cx="875974" cy="1609864"/>
+            <a:ext cx="917482" cy="1609864"/>
           </a:xfrm>
           <a:prstGeom prst="straightConnector1">
             <a:avLst/>
@@ -8950,8 +8916,8 @@
         </p:nvSpPr>
         <p:spPr>
           <a:xfrm>
-            <a:off x="3940828" y="2219468"/>
-            <a:ext cx="3592586" cy="666862"/>
+            <a:off x="3940827" y="2219468"/>
+            <a:ext cx="3669493" cy="666862"/>
           </a:xfrm>
           <a:prstGeom prst="rect">
             <a:avLst/>
@@ -9080,7 +9046,7 @@
         </p:nvSpPr>
         <p:spPr>
           <a:xfrm>
-            <a:off x="7848232" y="1288297"/>
+            <a:off x="7792671" y="1286884"/>
             <a:ext cx="2954655" cy="646331"/>
           </a:xfrm>
           <a:prstGeom prst="rect">
@@ -9118,7 +9084,7 @@
         </p:nvSpPr>
         <p:spPr>
           <a:xfrm>
-            <a:off x="7818813" y="1210573"/>
+            <a:off x="7763252" y="1209160"/>
             <a:ext cx="2919047" cy="629950"/>
           </a:xfrm>
           <a:prstGeom prst="rect">
@@ -9378,8 +9344,8 @@
         </p:nvSpPr>
         <p:spPr>
           <a:xfrm>
-            <a:off x="7769169" y="1840095"/>
-            <a:ext cx="4386694" cy="1981323"/>
+            <a:off x="7769169" y="1865856"/>
+            <a:ext cx="4386694" cy="1955562"/>
           </a:xfrm>
           <a:prstGeom prst="rect">
             <a:avLst/>
@@ -9426,7 +9392,7 @@
         </p:nvSpPr>
         <p:spPr>
           <a:xfrm>
-            <a:off x="7848232" y="4031802"/>
+            <a:off x="7792671" y="4010229"/>
             <a:ext cx="2954655" cy="646331"/>
           </a:xfrm>
           <a:prstGeom prst="rect">
@@ -9464,7 +9430,7 @@
         </p:nvSpPr>
         <p:spPr>
           <a:xfrm>
-            <a:off x="7818813" y="3954078"/>
+            <a:off x="7763252" y="3932505"/>
             <a:ext cx="2919047" cy="629950"/>
           </a:xfrm>
           <a:prstGeom prst="rect">
